--- a/production-library/templates/settled/product-courseware-green-v1/金银花露_商品培训课件_复刻验证.pptx
+++ b/production-library/templates/settled/product-courseware-green-v1/金银花露_商品培训课件_复刻验证.pptx
@@ -2,17 +2,17 @@
 <file path=ppt/presentation.xml><?xml version="1.0" encoding="utf-8"?>
 <p:presentation xmlns:p="http://schemas.openxmlformats.org/presentationml/2006/main">
   <p:sldMasterIdLst>
-    <p:sldMasterId xmlns:r="http://schemas.openxmlformats.org/officeDocument/2006/relationships" id="2147483648" r:id="Re1e46ec39d7244f8"/>
+    <p:sldMasterId xmlns:r="http://schemas.openxmlformats.org/officeDocument/2006/relationships" id="2147483648" r:id="R6c948c2a960a48f8"/>
   </p:sldMasterIdLst>
   <p:notesMasterIdLst>
-    <p:notesMasterId xmlns:r="http://schemas.openxmlformats.org/officeDocument/2006/relationships" r:id="R6fea4b73fd074792"/>
+    <p:notesMasterId xmlns:r="http://schemas.openxmlformats.org/officeDocument/2006/relationships" r:id="R4990dc86d54b49a7"/>
   </p:notesMasterIdLst>
   <p:sldIdLst>
-    <p:sldId xmlns:r="http://schemas.openxmlformats.org/officeDocument/2006/relationships" id="256" r:id="Re3159d3713ed4fb7"/>
-    <p:sldId xmlns:r="http://schemas.openxmlformats.org/officeDocument/2006/relationships" id="257" r:id="Rb28db05e376d4d05"/>
-    <p:sldId xmlns:r="http://schemas.openxmlformats.org/officeDocument/2006/relationships" id="258" r:id="R40663094ed3c455d"/>
-    <p:sldId xmlns:r="http://schemas.openxmlformats.org/officeDocument/2006/relationships" id="259" r:id="R8e885db1df9d4cc2"/>
-    <p:sldId xmlns:r="http://schemas.openxmlformats.org/officeDocument/2006/relationships" id="260" r:id="R5ce9db735e0e447a"/>
+    <p:sldId xmlns:r="http://schemas.openxmlformats.org/officeDocument/2006/relationships" id="256" r:id="R9c0992d9e26b416c"/>
+    <p:sldId xmlns:r="http://schemas.openxmlformats.org/officeDocument/2006/relationships" id="257" r:id="R795af62e449441fa"/>
+    <p:sldId xmlns:r="http://schemas.openxmlformats.org/officeDocument/2006/relationships" id="258" r:id="R4b6cadb09d1f4b45"/>
+    <p:sldId xmlns:r="http://schemas.openxmlformats.org/officeDocument/2006/relationships" id="259" r:id="R395d01921096433a"/>
+    <p:sldId xmlns:r="http://schemas.openxmlformats.org/officeDocument/2006/relationships" id="260" r:id="Rdc727c848b174f29"/>
   </p:sldIdLst>
   <p:sldSz cx="12192000" cy="6858000"/>
   <p:notesSz cx="6858000" cy="9144000"/>
@@ -869,7 +869,7 @@
   </p:cSld>
   <p:clrMap bg1="lt1" tx1="dk1" bg2="lt2" tx2="dk2" accent1="accent1" accent2="accent2" accent3="accent3" accent4="accent4" accent5="accent5" accent6="accent6" hlink="hlink" folHlink="folHlink"/>
   <p:sldLayoutIdLst>
-    <p:sldLayoutId xmlns:r="http://schemas.openxmlformats.org/officeDocument/2006/relationships" id="2147483649" r:id="Rd0b8223459014259"/>
+    <p:sldLayoutId xmlns:r="http://schemas.openxmlformats.org/officeDocument/2006/relationships" id="2147483649" r:id="Rd36a7ec6f5e94d80"/>
   </p:sldLayoutIdLst>
   <p:txStyles>
     <p:titleStyle>
@@ -1420,7 +1420,7 @@
           <p:cNvPr id="27" name="cover-color-field">
             <a:extLst xmlns:a="http://schemas.openxmlformats.org/drawingml/2006/main">
               <a:ext uri="{FF2B5EF4-FFF2-40B4-BE49-F238E27FC236}">
-                <a16:creationId xmlns:a16="http://schemas.microsoft.com/office/drawing/2014/main" id="{831FD66E-4265-48E8-9F42-A56D1B5D2878}"/>
+                <a16:creationId xmlns:a16="http://schemas.microsoft.com/office/drawing/2014/main" id="{B9597C85-5559-46E8-A511-19721177C874}"/>
               </a:ext>
             </a:extLst>
           </p:cNvPr>
@@ -1451,7 +1451,7 @@
           <p:cNvPr id="2" name="cover-blue-field">
             <a:extLst xmlns:a="http://schemas.openxmlformats.org/drawingml/2006/main">
               <a:ext uri="{FF2B5EF4-FFF2-40B4-BE49-F238E27FC236}">
-                <a16:creationId xmlns:a16="http://schemas.microsoft.com/office/drawing/2014/main" id="{A1135855-76B9-465A-A60E-D4352ABD44CE}"/>
+                <a16:creationId xmlns:a16="http://schemas.microsoft.com/office/drawing/2014/main" id="{76CE8515-6B88-4188-ACBC-49033EDB072A}"/>
               </a:ext>
             </a:extLst>
           </p:cNvPr>
@@ -1482,7 +1482,7 @@
           <p:cNvPr id="3" name="cover-green-overlay">
             <a:extLst xmlns:a="http://schemas.openxmlformats.org/drawingml/2006/main">
               <a:ext uri="{FF2B5EF4-FFF2-40B4-BE49-F238E27FC236}">
-                <a16:creationId xmlns:a16="http://schemas.microsoft.com/office/drawing/2014/main" id="{F6C828B6-2F8A-486A-A688-A27FD3F0F2FE}"/>
+                <a16:creationId xmlns:a16="http://schemas.microsoft.com/office/drawing/2014/main" id="{3F3FED0D-ECF2-4618-88FF-AB5A31E0BD5B}"/>
               </a:ext>
             </a:extLst>
           </p:cNvPr>
@@ -1513,7 +1513,7 @@
           <p:cNvPr id="4" name="cover-building-band-1">
             <a:extLst xmlns:a="http://schemas.openxmlformats.org/drawingml/2006/main">
               <a:ext uri="{FF2B5EF4-FFF2-40B4-BE49-F238E27FC236}">
-                <a16:creationId xmlns:a16="http://schemas.microsoft.com/office/drawing/2014/main" id="{FD1B470C-BD06-4AEB-AEB2-0BA4DE7BD949}"/>
+                <a16:creationId xmlns:a16="http://schemas.microsoft.com/office/drawing/2014/main" id="{F9BF3FF7-21C6-4DEE-B642-2FEF4FB4A389}"/>
               </a:ext>
             </a:extLst>
           </p:cNvPr>
@@ -1544,7 +1544,7 @@
           <p:cNvPr id="5" name="cover-building-band-2">
             <a:extLst xmlns:a="http://schemas.openxmlformats.org/drawingml/2006/main">
               <a:ext uri="{FF2B5EF4-FFF2-40B4-BE49-F238E27FC236}">
-                <a16:creationId xmlns:a16="http://schemas.microsoft.com/office/drawing/2014/main" id="{616EC723-59D7-4341-8399-6C1FE7134EE4}"/>
+                <a16:creationId xmlns:a16="http://schemas.microsoft.com/office/drawing/2014/main" id="{93E32347-1823-439F-AB49-62C7DCCA3167}"/>
               </a:ext>
             </a:extLst>
           </p:cNvPr>
@@ -1575,7 +1575,7 @@
           <p:cNvPr id="6" name="cover-building-band-3">
             <a:extLst xmlns:a="http://schemas.openxmlformats.org/drawingml/2006/main">
               <a:ext uri="{FF2B5EF4-FFF2-40B4-BE49-F238E27FC236}">
-                <a16:creationId xmlns:a16="http://schemas.microsoft.com/office/drawing/2014/main" id="{566D4842-B308-4274-8ED8-C03F31385E21}"/>
+                <a16:creationId xmlns:a16="http://schemas.microsoft.com/office/drawing/2014/main" id="{ADAF469D-9817-4B05-8C46-EEA1F14881CE}"/>
               </a:ext>
             </a:extLst>
           </p:cNvPr>
@@ -1606,7 +1606,7 @@
           <p:cNvPr id="7" name="cover-building-band-4">
             <a:extLst xmlns:a="http://schemas.openxmlformats.org/drawingml/2006/main">
               <a:ext uri="{FF2B5EF4-FFF2-40B4-BE49-F238E27FC236}">
-                <a16:creationId xmlns:a16="http://schemas.microsoft.com/office/drawing/2014/main" id="{F7DC4B24-D510-4E75-96FB-2C084D474DFB}"/>
+                <a16:creationId xmlns:a16="http://schemas.microsoft.com/office/drawing/2014/main" id="{6AC83AAE-E198-43AA-BDEA-982392D47265}"/>
               </a:ext>
             </a:extLst>
           </p:cNvPr>
@@ -1637,7 +1637,7 @@
           <p:cNvPr id="8" name="cover-building-band-5">
             <a:extLst xmlns:a="http://schemas.openxmlformats.org/drawingml/2006/main">
               <a:ext uri="{FF2B5EF4-FFF2-40B4-BE49-F238E27FC236}">
-                <a16:creationId xmlns:a16="http://schemas.microsoft.com/office/drawing/2014/main" id="{FBA4EC20-94DD-42D6-A100-2B66C6EF2EF0}"/>
+                <a16:creationId xmlns:a16="http://schemas.microsoft.com/office/drawing/2014/main" id="{5F3FE0F5-CD68-47B2-AE35-425F9CA8A51D}"/>
               </a:ext>
             </a:extLst>
           </p:cNvPr>
@@ -1668,7 +1668,7 @@
           <p:cNvPr id="9" name="cover-building-band-6">
             <a:extLst xmlns:a="http://schemas.openxmlformats.org/drawingml/2006/main">
               <a:ext uri="{FF2B5EF4-FFF2-40B4-BE49-F238E27FC236}">
-                <a16:creationId xmlns:a16="http://schemas.microsoft.com/office/drawing/2014/main" id="{DF32B4DF-E25C-49F7-9818-E72C39E66C18}"/>
+                <a16:creationId xmlns:a16="http://schemas.microsoft.com/office/drawing/2014/main" id="{EBC8F575-984D-4944-BBEF-447F24EB1C98}"/>
               </a:ext>
             </a:extLst>
           </p:cNvPr>
@@ -1699,7 +1699,7 @@
           <p:cNvPr id="10" name="cover-building-band-7">
             <a:extLst xmlns:a="http://schemas.openxmlformats.org/drawingml/2006/main">
               <a:ext uri="{FF2B5EF4-FFF2-40B4-BE49-F238E27FC236}">
-                <a16:creationId xmlns:a16="http://schemas.microsoft.com/office/drawing/2014/main" id="{22287ABF-1B12-4BA8-8356-15DFDD0A17AA}"/>
+                <a16:creationId xmlns:a16="http://schemas.microsoft.com/office/drawing/2014/main" id="{960ADAB1-2847-48F0-A896-BC46A5528536}"/>
               </a:ext>
             </a:extLst>
           </p:cNvPr>
@@ -1730,7 +1730,7 @@
           <p:cNvPr id="11" name="cover-building-band-8">
             <a:extLst xmlns:a="http://schemas.openxmlformats.org/drawingml/2006/main">
               <a:ext uri="{FF2B5EF4-FFF2-40B4-BE49-F238E27FC236}">
-                <a16:creationId xmlns:a16="http://schemas.microsoft.com/office/drawing/2014/main" id="{2DC6CD7F-4939-4777-BBFB-B96B191B75D7}"/>
+                <a16:creationId xmlns:a16="http://schemas.microsoft.com/office/drawing/2014/main" id="{2C79102C-28CD-409C-8654-83C2B8CA8ACB}"/>
               </a:ext>
             </a:extLst>
           </p:cNvPr>
@@ -1761,7 +1761,7 @@
           <p:cNvPr id="12" name="cover-building-band-9">
             <a:extLst xmlns:a="http://schemas.openxmlformats.org/drawingml/2006/main">
               <a:ext uri="{FF2B5EF4-FFF2-40B4-BE49-F238E27FC236}">
-                <a16:creationId xmlns:a16="http://schemas.microsoft.com/office/drawing/2014/main" id="{CF5A3362-D990-48A9-8261-034C081440F4}"/>
+                <a16:creationId xmlns:a16="http://schemas.microsoft.com/office/drawing/2014/main" id="{9564F5C1-9147-41F0-8087-33866BFDE5C0}"/>
               </a:ext>
             </a:extLst>
           </p:cNvPr>
@@ -1792,7 +1792,7 @@
           <p:cNvPr id="13" name="cover-building-band-10">
             <a:extLst xmlns:a="http://schemas.openxmlformats.org/drawingml/2006/main">
               <a:ext uri="{FF2B5EF4-FFF2-40B4-BE49-F238E27FC236}">
-                <a16:creationId xmlns:a16="http://schemas.microsoft.com/office/drawing/2014/main" id="{2B89EA86-E299-476A-A84D-C2AA93EB4E73}"/>
+                <a16:creationId xmlns:a16="http://schemas.microsoft.com/office/drawing/2014/main" id="{2837874F-94F0-4299-A3DF-180DE043D9BF}"/>
               </a:ext>
             </a:extLst>
           </p:cNvPr>
@@ -1823,7 +1823,7 @@
           <p:cNvPr id="14" name="cover-white-bottom">
             <a:extLst xmlns:a="http://schemas.openxmlformats.org/drawingml/2006/main">
               <a:ext uri="{FF2B5EF4-FFF2-40B4-BE49-F238E27FC236}">
-                <a16:creationId xmlns:a16="http://schemas.microsoft.com/office/drawing/2014/main" id="{11D1AC9D-5E7B-451E-9079-2E36DCA32C0D}"/>
+                <a16:creationId xmlns:a16="http://schemas.microsoft.com/office/drawing/2014/main" id="{E7220808-E654-4948-B274-D492F1073D2A}"/>
               </a:ext>
             </a:extLst>
           </p:cNvPr>
@@ -1854,7 +1854,7 @@
           <p:cNvPr id="15" name="cover-white-curve">
             <a:extLst xmlns:a="http://schemas.openxmlformats.org/drawingml/2006/main">
               <a:ext uri="{FF2B5EF4-FFF2-40B4-BE49-F238E27FC236}">
-                <a16:creationId xmlns:a16="http://schemas.microsoft.com/office/drawing/2014/main" id="{69EB684F-4D6F-4D34-B248-62661E3A4CC9}"/>
+                <a16:creationId xmlns:a16="http://schemas.microsoft.com/office/drawing/2014/main" id="{BE74E146-06D6-4883-BC9B-209C2F74ABE7}"/>
               </a:ext>
             </a:extLst>
           </p:cNvPr>
@@ -1885,7 +1885,7 @@
           <p:cNvPr id="16" name="cover-frame-top">
             <a:extLst xmlns:a="http://schemas.openxmlformats.org/drawingml/2006/main">
               <a:ext uri="{FF2B5EF4-FFF2-40B4-BE49-F238E27FC236}">
-                <a16:creationId xmlns:a16="http://schemas.microsoft.com/office/drawing/2014/main" id="{5C942A8F-5CD3-40A4-9224-B3481A78C542}"/>
+                <a16:creationId xmlns:a16="http://schemas.microsoft.com/office/drawing/2014/main" id="{C75D2B38-A17D-47AC-A26E-3C3F16BA5346}"/>
               </a:ext>
             </a:extLst>
           </p:cNvPr>
@@ -1916,7 +1916,7 @@
           <p:cNvPr id="17" name="cover-frame-left">
             <a:extLst xmlns:a="http://schemas.openxmlformats.org/drawingml/2006/main">
               <a:ext uri="{FF2B5EF4-FFF2-40B4-BE49-F238E27FC236}">
-                <a16:creationId xmlns:a16="http://schemas.microsoft.com/office/drawing/2014/main" id="{4C03EA1F-5C14-4011-957C-341AC1ECAE1E}"/>
+                <a16:creationId xmlns:a16="http://schemas.microsoft.com/office/drawing/2014/main" id="{46B9CBFD-DC20-4215-834A-0C33A40F95B5}"/>
               </a:ext>
             </a:extLst>
           </p:cNvPr>
@@ -1947,7 +1947,7 @@
           <p:cNvPr id="18" name="cover-frame-right">
             <a:extLst xmlns:a="http://schemas.openxmlformats.org/drawingml/2006/main">
               <a:ext uri="{FF2B5EF4-FFF2-40B4-BE49-F238E27FC236}">
-                <a16:creationId xmlns:a16="http://schemas.microsoft.com/office/drawing/2014/main" id="{8BC81ED8-503A-445B-ACA3-D0E6B91CEDD1}"/>
+                <a16:creationId xmlns:a16="http://schemas.microsoft.com/office/drawing/2014/main" id="{80226A80-AA1E-4959-AE50-214C3A5594C7}"/>
               </a:ext>
             </a:extLst>
           </p:cNvPr>
@@ -1978,7 +1978,7 @@
           <p:cNvPr id="19" name="cover-frame-bottom">
             <a:extLst xmlns:a="http://schemas.openxmlformats.org/drawingml/2006/main">
               <a:ext uri="{FF2B5EF4-FFF2-40B4-BE49-F238E27FC236}">
-                <a16:creationId xmlns:a16="http://schemas.microsoft.com/office/drawing/2014/main" id="{A48BAB45-33F4-4B21-9993-3D57853E422A}"/>
+                <a16:creationId xmlns:a16="http://schemas.microsoft.com/office/drawing/2014/main" id="{A989D893-4A68-4C44-B1F8-619E25973FC0}"/>
               </a:ext>
             </a:extLst>
           </p:cNvPr>
@@ -2009,7 +2009,7 @@
           <p:cNvPr id="20" name="cover-brand">
             <a:extLst xmlns:a="http://schemas.openxmlformats.org/drawingml/2006/main">
               <a:ext uri="{FF2B5EF4-FFF2-40B4-BE49-F238E27FC236}">
-                <a16:creationId xmlns:a16="http://schemas.microsoft.com/office/drawing/2014/main" id="{537154CE-3585-44B1-B462-F4C0AC66FDFD}"/>
+                <a16:creationId xmlns:a16="http://schemas.microsoft.com/office/drawing/2014/main" id="{CB21EECB-4AE4-4D14-80E2-FC6CB19951C0}"/>
               </a:ext>
             </a:extLst>
           </p:cNvPr>
@@ -2062,7 +2062,7 @@
           <p:cNvPr id="21" name="cover-organization">
             <a:extLst xmlns:a="http://schemas.openxmlformats.org/drawingml/2006/main">
               <a:ext uri="{FF2B5EF4-FFF2-40B4-BE49-F238E27FC236}">
-                <a16:creationId xmlns:a16="http://schemas.microsoft.com/office/drawing/2014/main" id="{AA8D7567-B8D7-4D24-A818-FE4AF63CB360}"/>
+                <a16:creationId xmlns:a16="http://schemas.microsoft.com/office/drawing/2014/main" id="{E040BFC5-6442-4138-B4F7-D5D7449D9FA4}"/>
               </a:ext>
             </a:extLst>
           </p:cNvPr>
@@ -2115,7 +2115,7 @@
           <p:cNvPr id="22" name="cover-rule-left">
             <a:extLst xmlns:a="http://schemas.openxmlformats.org/drawingml/2006/main">
               <a:ext uri="{FF2B5EF4-FFF2-40B4-BE49-F238E27FC236}">
-                <a16:creationId xmlns:a16="http://schemas.microsoft.com/office/drawing/2014/main" id="{41570D30-3790-4483-A7D0-8548D6C06D89}"/>
+                <a16:creationId xmlns:a16="http://schemas.microsoft.com/office/drawing/2014/main" id="{93D83B5F-0038-4408-96D0-E857151DC2A3}"/>
               </a:ext>
             </a:extLst>
           </p:cNvPr>
@@ -2146,7 +2146,7 @@
           <p:cNvPr id="23" name="cover-rule-right">
             <a:extLst xmlns:a="http://schemas.openxmlformats.org/drawingml/2006/main">
               <a:ext uri="{FF2B5EF4-FFF2-40B4-BE49-F238E27FC236}">
-                <a16:creationId xmlns:a16="http://schemas.microsoft.com/office/drawing/2014/main" id="{8462F875-34F5-42CB-A0B2-14A013356E1B}"/>
+                <a16:creationId xmlns:a16="http://schemas.microsoft.com/office/drawing/2014/main" id="{68F5146A-5CFF-44F1-ADE2-BF3C0A3C0D9B}"/>
               </a:ext>
             </a:extLst>
           </p:cNvPr>
@@ -2177,7 +2177,7 @@
           <p:cNvPr id="24" name="cover-title">
             <a:extLst xmlns:a="http://schemas.openxmlformats.org/drawingml/2006/main">
               <a:ext uri="{FF2B5EF4-FFF2-40B4-BE49-F238E27FC236}">
-                <a16:creationId xmlns:a16="http://schemas.microsoft.com/office/drawing/2014/main" id="{DB850EFF-F99D-4AE4-B74F-9C2D15F996E2}"/>
+                <a16:creationId xmlns:a16="http://schemas.microsoft.com/office/drawing/2014/main" id="{A90E8784-FDC8-45A5-B805-14D011894286}"/>
               </a:ext>
             </a:extLst>
           </p:cNvPr>
@@ -2230,7 +2230,7 @@
           <p:cNvPr id="25" name="cover-tagline">
             <a:extLst xmlns:a="http://schemas.openxmlformats.org/drawingml/2006/main">
               <a:ext uri="{FF2B5EF4-FFF2-40B4-BE49-F238E27FC236}">
-                <a16:creationId xmlns:a16="http://schemas.microsoft.com/office/drawing/2014/main" id="{0DDEA769-03D6-42F3-B96C-8FB9BF8BC03A}"/>
+                <a16:creationId xmlns:a16="http://schemas.microsoft.com/office/drawing/2014/main" id="{C808C601-9EFF-4C3F-BE63-781D5A27BAB9}"/>
               </a:ext>
             </a:extLst>
           </p:cNvPr>
@@ -2285,7 +2285,7 @@
           <p:cNvPr id="26" name="internal-notice">
             <a:extLst xmlns:a="http://schemas.openxmlformats.org/drawingml/2006/main">
               <a:ext uri="{FF2B5EF4-FFF2-40B4-BE49-F238E27FC236}">
-                <a16:creationId xmlns:a16="http://schemas.microsoft.com/office/drawing/2014/main" id="{90F8CF9E-2BE3-4AAE-8B18-46420A666CB9}"/>
+                <a16:creationId xmlns:a16="http://schemas.microsoft.com/office/drawing/2014/main" id="{D6F02779-1A64-4683-907D-CAB58A390D1E}"/>
               </a:ext>
             </a:extLst>
           </p:cNvPr>
@@ -2336,7 +2336,7 @@
     </p:spTree>
     <p:extLst>
       <p:ext uri="{BB962C8B-B14F-4D97-AF65-F5344CB8AC3E}">
-        <p14:creationId xmlns:p14="http://schemas.microsoft.com/office/powerpoint/2010/main" val="2026683290"/>
+        <p14:creationId xmlns:p14="http://schemas.microsoft.com/office/powerpoint/2010/main" val="959530619"/>
       </p:ext>
     </p:extLst>
   </p:cSld>
@@ -2367,7 +2367,7 @@
           <p:cNvPr id="41" name="header-shadow-line">
             <a:extLst xmlns:a="http://schemas.openxmlformats.org/drawingml/2006/main">
               <a:ext uri="{FF2B5EF4-FFF2-40B4-BE49-F238E27FC236}">
-                <a16:creationId xmlns:a16="http://schemas.microsoft.com/office/drawing/2014/main" id="{761C54A5-85BC-40BE-B551-C7327BB46AEC}"/>
+                <a16:creationId xmlns:a16="http://schemas.microsoft.com/office/drawing/2014/main" id="{3AC2647E-63D3-4C09-ACF1-ADA92704648D}"/>
               </a:ext>
             </a:extLst>
           </p:cNvPr>
@@ -2398,7 +2398,7 @@
           <p:cNvPr id="2" name="header-green-line">
             <a:extLst xmlns:a="http://schemas.openxmlformats.org/drawingml/2006/main">
               <a:ext uri="{FF2B5EF4-FFF2-40B4-BE49-F238E27FC236}">
-                <a16:creationId xmlns:a16="http://schemas.microsoft.com/office/drawing/2014/main" id="{1F059C5C-778E-4064-9D5A-D3815D4B7D7D}"/>
+                <a16:creationId xmlns:a16="http://schemas.microsoft.com/office/drawing/2014/main" id="{1D1C2869-A642-483A-8711-7A963A0C05EB}"/>
               </a:ext>
             </a:extLst>
           </p:cNvPr>
@@ -2429,7 +2429,7 @@
           <p:cNvPr id="3" name="page-number-block">
             <a:extLst xmlns:a="http://schemas.openxmlformats.org/drawingml/2006/main">
               <a:ext uri="{FF2B5EF4-FFF2-40B4-BE49-F238E27FC236}">
-                <a16:creationId xmlns:a16="http://schemas.microsoft.com/office/drawing/2014/main" id="{58928FF0-2BBE-4D06-AB37-5068B3586E22}"/>
+                <a16:creationId xmlns:a16="http://schemas.microsoft.com/office/drawing/2014/main" id="{BB40637F-0A95-4827-ACBC-A79097CB46E4}"/>
               </a:ext>
             </a:extLst>
           </p:cNvPr>
@@ -2460,7 +2460,7 @@
           <p:cNvPr id="4" name="page-number">
             <a:extLst xmlns:a="http://schemas.openxmlformats.org/drawingml/2006/main">
               <a:ext uri="{FF2B5EF4-FFF2-40B4-BE49-F238E27FC236}">
-                <a16:creationId xmlns:a16="http://schemas.microsoft.com/office/drawing/2014/main" id="{95A639D7-BB64-4028-A08F-CFBE8F37D1A1}"/>
+                <a16:creationId xmlns:a16="http://schemas.microsoft.com/office/drawing/2014/main" id="{9B5A57A4-B76A-47CE-87DD-597F3573F877}"/>
               </a:ext>
             </a:extLst>
           </p:cNvPr>
@@ -2513,7 +2513,7 @@
           <p:cNvPr id="5" name="page-title">
             <a:extLst xmlns:a="http://schemas.openxmlformats.org/drawingml/2006/main">
               <a:ext uri="{FF2B5EF4-FFF2-40B4-BE49-F238E27FC236}">
-                <a16:creationId xmlns:a16="http://schemas.microsoft.com/office/drawing/2014/main" id="{CD545A7C-0A0B-4354-BE7C-5DB12AECF181}"/>
+                <a16:creationId xmlns:a16="http://schemas.microsoft.com/office/drawing/2014/main" id="{0284E1E4-5ABE-4C1A-A684-6B6ECCFD94D2}"/>
               </a:ext>
             </a:extLst>
           </p:cNvPr>
@@ -2566,7 +2566,7 @@
           <p:cNvPr id="6" name="brand-wordmark">
             <a:extLst xmlns:a="http://schemas.openxmlformats.org/drawingml/2006/main">
               <a:ext uri="{FF2B5EF4-FFF2-40B4-BE49-F238E27FC236}">
-                <a16:creationId xmlns:a16="http://schemas.microsoft.com/office/drawing/2014/main" id="{B4B93589-0028-499C-9E3A-2439B60C0EDE}"/>
+                <a16:creationId xmlns:a16="http://schemas.microsoft.com/office/drawing/2014/main" id="{2914E371-28E7-4C84-8459-921996811D84}"/>
               </a:ext>
             </a:extLst>
           </p:cNvPr>
@@ -2619,7 +2619,7 @@
           <p:cNvPr id="7" name="internal-notice">
             <a:extLst xmlns:a="http://schemas.openxmlformats.org/drawingml/2006/main">
               <a:ext uri="{FF2B5EF4-FFF2-40B4-BE49-F238E27FC236}">
-                <a16:creationId xmlns:a16="http://schemas.microsoft.com/office/drawing/2014/main" id="{7A2A7F43-BC07-4ABD-9DBF-956F13948E97}"/>
+                <a16:creationId xmlns:a16="http://schemas.microsoft.com/office/drawing/2014/main" id="{D2F6205F-9E86-4B7D-92D6-33CD4BA4965C}"/>
               </a:ext>
             </a:extLst>
           </p:cNvPr>
@@ -2672,7 +2672,7 @@
           <p:cNvPr id="8" name="primary-packshot-surface">
             <a:extLst xmlns:a="http://schemas.openxmlformats.org/drawingml/2006/main">
               <a:ext uri="{FF2B5EF4-FFF2-40B4-BE49-F238E27FC236}">
-                <a16:creationId xmlns:a16="http://schemas.microsoft.com/office/drawing/2014/main" id="{6186B01A-574A-477F-90B7-C149C37F17FE}"/>
+                <a16:creationId xmlns:a16="http://schemas.microsoft.com/office/drawing/2014/main" id="{651D1671-F825-4A25-BB59-B74240F4B110}"/>
               </a:ext>
             </a:extLst>
           </p:cNvPr>
@@ -2705,7 +2705,7 @@
           <p:cNvPr id="9" name="primary-packshot-label">
             <a:extLst xmlns:a="http://schemas.openxmlformats.org/drawingml/2006/main">
               <a:ext uri="{FF2B5EF4-FFF2-40B4-BE49-F238E27FC236}">
-                <a16:creationId xmlns:a16="http://schemas.microsoft.com/office/drawing/2014/main" id="{A533743D-DF9D-4112-97FE-87E764124F85}"/>
+                <a16:creationId xmlns:a16="http://schemas.microsoft.com/office/drawing/2014/main" id="{71163ACE-9833-4BF1-96F9-A964E68C38E8}"/>
               </a:ext>
             </a:extLst>
           </p:cNvPr>
@@ -2778,7 +2778,7 @@
           <p:cNvPr id="10" name="product-name">
             <a:extLst xmlns:a="http://schemas.openxmlformats.org/drawingml/2006/main">
               <a:ext uri="{FF2B5EF4-FFF2-40B4-BE49-F238E27FC236}">
-                <a16:creationId xmlns:a16="http://schemas.microsoft.com/office/drawing/2014/main" id="{A37138E6-035F-493B-8A4F-DACEE46217B8}"/>
+                <a16:creationId xmlns:a16="http://schemas.microsoft.com/office/drawing/2014/main" id="{65AB2EFB-0B58-4543-A03F-F8E52E7B6D1E}"/>
               </a:ext>
             </a:extLst>
           </p:cNvPr>
@@ -2831,7 +2831,7 @@
           <p:cNvPr id="11" name="product-table-head-0-surface">
             <a:extLst xmlns:a="http://schemas.openxmlformats.org/drawingml/2006/main">
               <a:ext uri="{FF2B5EF4-FFF2-40B4-BE49-F238E27FC236}">
-                <a16:creationId xmlns:a16="http://schemas.microsoft.com/office/drawing/2014/main" id="{04023CFF-6912-4222-A53E-DE5FC6AA6F5F}"/>
+                <a16:creationId xmlns:a16="http://schemas.microsoft.com/office/drawing/2014/main" id="{B07CEB68-E28D-4BA2-8788-E24C3EF1DBED}"/>
               </a:ext>
             </a:extLst>
           </p:cNvPr>
@@ -2864,7 +2864,7 @@
           <p:cNvPr id="12" name="product-table-head-0-text">
             <a:extLst xmlns:a="http://schemas.openxmlformats.org/drawingml/2006/main">
               <a:ext uri="{FF2B5EF4-FFF2-40B4-BE49-F238E27FC236}">
-                <a16:creationId xmlns:a16="http://schemas.microsoft.com/office/drawing/2014/main" id="{51C1779C-11B5-4506-86C0-0CB1937CC15F}"/>
+                <a16:creationId xmlns:a16="http://schemas.microsoft.com/office/drawing/2014/main" id="{9562BD08-99F5-4BE8-B02B-7F791CBDA0A9}"/>
               </a:ext>
             </a:extLst>
           </p:cNvPr>
@@ -2917,7 +2917,7 @@
           <p:cNvPr id="13" name="product-table-head-1-surface">
             <a:extLst xmlns:a="http://schemas.openxmlformats.org/drawingml/2006/main">
               <a:ext uri="{FF2B5EF4-FFF2-40B4-BE49-F238E27FC236}">
-                <a16:creationId xmlns:a16="http://schemas.microsoft.com/office/drawing/2014/main" id="{E984DEFF-1197-4563-8896-A1C8917BF044}"/>
+                <a16:creationId xmlns:a16="http://schemas.microsoft.com/office/drawing/2014/main" id="{A9C334D1-52B2-4303-A2BA-7E5196879566}"/>
               </a:ext>
             </a:extLst>
           </p:cNvPr>
@@ -2950,7 +2950,7 @@
           <p:cNvPr id="14" name="product-table-head-1-text">
             <a:extLst xmlns:a="http://schemas.openxmlformats.org/drawingml/2006/main">
               <a:ext uri="{FF2B5EF4-FFF2-40B4-BE49-F238E27FC236}">
-                <a16:creationId xmlns:a16="http://schemas.microsoft.com/office/drawing/2014/main" id="{26C92935-860F-4F28-AE2C-B60D56238D37}"/>
+                <a16:creationId xmlns:a16="http://schemas.microsoft.com/office/drawing/2014/main" id="{78A08983-7DA5-465B-80E1-1AF154E8B231}"/>
               </a:ext>
             </a:extLst>
           </p:cNvPr>
@@ -3003,7 +3003,7 @@
           <p:cNvPr id="15" name="product-table-head-2-surface">
             <a:extLst xmlns:a="http://schemas.openxmlformats.org/drawingml/2006/main">
               <a:ext uri="{FF2B5EF4-FFF2-40B4-BE49-F238E27FC236}">
-                <a16:creationId xmlns:a16="http://schemas.microsoft.com/office/drawing/2014/main" id="{3DC8528C-18A0-469E-970E-2558130089FF}"/>
+                <a16:creationId xmlns:a16="http://schemas.microsoft.com/office/drawing/2014/main" id="{D2BBA36B-EF85-4100-8A3E-761E74605F0A}"/>
               </a:ext>
             </a:extLst>
           </p:cNvPr>
@@ -3036,7 +3036,7 @@
           <p:cNvPr id="16" name="product-table-head-2-text">
             <a:extLst xmlns:a="http://schemas.openxmlformats.org/drawingml/2006/main">
               <a:ext uri="{FF2B5EF4-FFF2-40B4-BE49-F238E27FC236}">
-                <a16:creationId xmlns:a16="http://schemas.microsoft.com/office/drawing/2014/main" id="{5D598DD7-6493-444C-8665-D13244F5D3B0}"/>
+                <a16:creationId xmlns:a16="http://schemas.microsoft.com/office/drawing/2014/main" id="{700D2A89-52E2-47AA-87CF-13D99FCE403D}"/>
               </a:ext>
             </a:extLst>
           </p:cNvPr>
@@ -3089,7 +3089,7 @@
           <p:cNvPr id="17" name="product-table-head-3-surface">
             <a:extLst xmlns:a="http://schemas.openxmlformats.org/drawingml/2006/main">
               <a:ext uri="{FF2B5EF4-FFF2-40B4-BE49-F238E27FC236}">
-                <a16:creationId xmlns:a16="http://schemas.microsoft.com/office/drawing/2014/main" id="{32E623CC-5478-44E0-A570-681E1982C991}"/>
+                <a16:creationId xmlns:a16="http://schemas.microsoft.com/office/drawing/2014/main" id="{5CB3DE06-AE7C-459E-A9A4-59C31719EC2D}"/>
               </a:ext>
             </a:extLst>
           </p:cNvPr>
@@ -3122,7 +3122,7 @@
           <p:cNvPr id="18" name="product-table-head-3-text">
             <a:extLst xmlns:a="http://schemas.openxmlformats.org/drawingml/2006/main">
               <a:ext uri="{FF2B5EF4-FFF2-40B4-BE49-F238E27FC236}">
-                <a16:creationId xmlns:a16="http://schemas.microsoft.com/office/drawing/2014/main" id="{15D439F4-7EED-479D-8885-09103F5F4E78}"/>
+                <a16:creationId xmlns:a16="http://schemas.microsoft.com/office/drawing/2014/main" id="{8B4A9933-5F84-4CCA-8A8F-F068297CA43C}"/>
               </a:ext>
             </a:extLst>
           </p:cNvPr>
@@ -3175,7 +3175,7 @@
           <p:cNvPr id="19" name="product-table-value-0-surface">
             <a:extLst xmlns:a="http://schemas.openxmlformats.org/drawingml/2006/main">
               <a:ext uri="{FF2B5EF4-FFF2-40B4-BE49-F238E27FC236}">
-                <a16:creationId xmlns:a16="http://schemas.microsoft.com/office/drawing/2014/main" id="{E07BB0B7-5A95-4E29-B6BC-75E93F186A5E}"/>
+                <a16:creationId xmlns:a16="http://schemas.microsoft.com/office/drawing/2014/main" id="{36ACBC85-A8DC-4255-BA22-9903CB57E414}"/>
               </a:ext>
             </a:extLst>
           </p:cNvPr>
@@ -3208,7 +3208,7 @@
           <p:cNvPr id="20" name="product-table-value-0-text">
             <a:extLst xmlns:a="http://schemas.openxmlformats.org/drawingml/2006/main">
               <a:ext uri="{FF2B5EF4-FFF2-40B4-BE49-F238E27FC236}">
-                <a16:creationId xmlns:a16="http://schemas.microsoft.com/office/drawing/2014/main" id="{48E2FF3F-6493-45E3-9C69-4419114FF8C1}"/>
+                <a16:creationId xmlns:a16="http://schemas.microsoft.com/office/drawing/2014/main" id="{FFEEFD15-741C-4F8F-896C-D6FDB8F47885}"/>
               </a:ext>
             </a:extLst>
           </p:cNvPr>
@@ -3261,7 +3261,7 @@
           <p:cNvPr id="21" name="product-table-value-1-surface">
             <a:extLst xmlns:a="http://schemas.openxmlformats.org/drawingml/2006/main">
               <a:ext uri="{FF2B5EF4-FFF2-40B4-BE49-F238E27FC236}">
-                <a16:creationId xmlns:a16="http://schemas.microsoft.com/office/drawing/2014/main" id="{A7CDD28B-92F6-488E-8B39-AB1DC0A8A6E4}"/>
+                <a16:creationId xmlns:a16="http://schemas.microsoft.com/office/drawing/2014/main" id="{DF5E4EF0-DFDE-4289-9A25-CA3639D940CF}"/>
               </a:ext>
             </a:extLst>
           </p:cNvPr>
@@ -3294,7 +3294,7 @@
           <p:cNvPr id="22" name="product-table-value-1-text">
             <a:extLst xmlns:a="http://schemas.openxmlformats.org/drawingml/2006/main">
               <a:ext uri="{FF2B5EF4-FFF2-40B4-BE49-F238E27FC236}">
-                <a16:creationId xmlns:a16="http://schemas.microsoft.com/office/drawing/2014/main" id="{AB8BEE93-08BB-4255-8AE0-76B04430C24A}"/>
+                <a16:creationId xmlns:a16="http://schemas.microsoft.com/office/drawing/2014/main" id="{EE1827C4-698B-47BB-BA64-534DC2D437E2}"/>
               </a:ext>
             </a:extLst>
           </p:cNvPr>
@@ -3347,7 +3347,7 @@
           <p:cNvPr id="23" name="product-table-value-2-surface">
             <a:extLst xmlns:a="http://schemas.openxmlformats.org/drawingml/2006/main">
               <a:ext uri="{FF2B5EF4-FFF2-40B4-BE49-F238E27FC236}">
-                <a16:creationId xmlns:a16="http://schemas.microsoft.com/office/drawing/2014/main" id="{47898786-9441-4532-A5D6-A1B64FD6E190}"/>
+                <a16:creationId xmlns:a16="http://schemas.microsoft.com/office/drawing/2014/main" id="{E929B07B-6336-4CD5-9229-D88479E8E452}"/>
               </a:ext>
             </a:extLst>
           </p:cNvPr>
@@ -3380,7 +3380,7 @@
           <p:cNvPr id="24" name="product-table-value-2-text">
             <a:extLst xmlns:a="http://schemas.openxmlformats.org/drawingml/2006/main">
               <a:ext uri="{FF2B5EF4-FFF2-40B4-BE49-F238E27FC236}">
-                <a16:creationId xmlns:a16="http://schemas.microsoft.com/office/drawing/2014/main" id="{A644D3A2-5B08-4675-A3D1-79843598453D}"/>
+                <a16:creationId xmlns:a16="http://schemas.microsoft.com/office/drawing/2014/main" id="{070E24D8-3F7D-458E-82C7-D10827EBF6DD}"/>
               </a:ext>
             </a:extLst>
           </p:cNvPr>
@@ -3433,7 +3433,7 @@
           <p:cNvPr id="25" name="product-table-value-3-surface">
             <a:extLst xmlns:a="http://schemas.openxmlformats.org/drawingml/2006/main">
               <a:ext uri="{FF2B5EF4-FFF2-40B4-BE49-F238E27FC236}">
-                <a16:creationId xmlns:a16="http://schemas.microsoft.com/office/drawing/2014/main" id="{0F35C511-A708-4082-9AEF-4C86647797F3}"/>
+                <a16:creationId xmlns:a16="http://schemas.microsoft.com/office/drawing/2014/main" id="{AD5A38ED-DBB1-410B-8437-61B38E291A87}"/>
               </a:ext>
             </a:extLst>
           </p:cNvPr>
@@ -3466,7 +3466,7 @@
           <p:cNvPr id="26" name="product-table-value-3-text">
             <a:extLst xmlns:a="http://schemas.openxmlformats.org/drawingml/2006/main">
               <a:ext uri="{FF2B5EF4-FFF2-40B4-BE49-F238E27FC236}">
-                <a16:creationId xmlns:a16="http://schemas.microsoft.com/office/drawing/2014/main" id="{16DF90C8-7928-4387-8F19-03357013280D}"/>
+                <a16:creationId xmlns:a16="http://schemas.microsoft.com/office/drawing/2014/main" id="{BF834963-461B-4F62-8000-DEA295EBFE13}"/>
               </a:ext>
             </a:extLst>
           </p:cNvPr>
@@ -3519,7 +3519,7 @@
           <p:cNvPr id="27" name="selling-point-highlight">
             <a:extLst xmlns:a="http://schemas.openxmlformats.org/drawingml/2006/main">
               <a:ext uri="{FF2B5EF4-FFF2-40B4-BE49-F238E27FC236}">
-                <a16:creationId xmlns:a16="http://schemas.microsoft.com/office/drawing/2014/main" id="{09CB82D2-9D6E-4420-B9D6-1FA65EE5DF28}"/>
+                <a16:creationId xmlns:a16="http://schemas.microsoft.com/office/drawing/2014/main" id="{29EA4A5A-87AE-4858-B1CD-647E57C56CF5}"/>
               </a:ext>
             </a:extLst>
           </p:cNvPr>
@@ -3550,7 +3550,7 @@
           <p:cNvPr id="28" name="selling-point">
             <a:extLst xmlns:a="http://schemas.openxmlformats.org/drawingml/2006/main">
               <a:ext uri="{FF2B5EF4-FFF2-40B4-BE49-F238E27FC236}">
-                <a16:creationId xmlns:a16="http://schemas.microsoft.com/office/drawing/2014/main" id="{0D25C0EB-1F5C-4EE3-8C87-C491AB2A9B1F}"/>
+                <a16:creationId xmlns:a16="http://schemas.microsoft.com/office/drawing/2014/main" id="{F0D09D03-914F-4E12-9989-2F5C1DE8B49C}"/>
               </a:ext>
             </a:extLst>
           </p:cNvPr>
@@ -3603,7 +3603,7 @@
           <p:cNvPr id="29" name="section-title-0">
             <a:extLst xmlns:a="http://schemas.openxmlformats.org/drawingml/2006/main">
               <a:ext uri="{FF2B5EF4-FFF2-40B4-BE49-F238E27FC236}">
-                <a16:creationId xmlns:a16="http://schemas.microsoft.com/office/drawing/2014/main" id="{1D5F43E7-5C24-4F4B-A468-DB45A0D34969}"/>
+                <a16:creationId xmlns:a16="http://schemas.microsoft.com/office/drawing/2014/main" id="{8931EF60-506D-403B-B6A7-5EDAC3C5F430}"/>
               </a:ext>
             </a:extLst>
           </p:cNvPr>
@@ -3658,7 +3658,7 @@
           <p:cNvPr id="30" name="section-0-item-0">
             <a:extLst xmlns:a="http://schemas.openxmlformats.org/drawingml/2006/main">
               <a:ext uri="{FF2B5EF4-FFF2-40B4-BE49-F238E27FC236}">
-                <a16:creationId xmlns:a16="http://schemas.microsoft.com/office/drawing/2014/main" id="{D86FCB80-3606-4DAF-AC5A-BBA0CF508854}"/>
+                <a16:creationId xmlns:a16="http://schemas.microsoft.com/office/drawing/2014/main" id="{63A26BB1-213E-499E-ACE5-4994195EA1B1}"/>
               </a:ext>
             </a:extLst>
           </p:cNvPr>
@@ -3711,7 +3711,7 @@
           <p:cNvPr id="31" name="section-0-item-1">
             <a:extLst xmlns:a="http://schemas.openxmlformats.org/drawingml/2006/main">
               <a:ext uri="{FF2B5EF4-FFF2-40B4-BE49-F238E27FC236}">
-                <a16:creationId xmlns:a16="http://schemas.microsoft.com/office/drawing/2014/main" id="{AD86478C-1975-4CEA-AA92-9E2DEE8F75E5}"/>
+                <a16:creationId xmlns:a16="http://schemas.microsoft.com/office/drawing/2014/main" id="{FDA24C82-0A94-4797-BD0D-6EF2EC620E8D}"/>
               </a:ext>
             </a:extLst>
           </p:cNvPr>
@@ -3764,7 +3764,7 @@
           <p:cNvPr id="32" name="section-0-item-2">
             <a:extLst xmlns:a="http://schemas.openxmlformats.org/drawingml/2006/main">
               <a:ext uri="{FF2B5EF4-FFF2-40B4-BE49-F238E27FC236}">
-                <a16:creationId xmlns:a16="http://schemas.microsoft.com/office/drawing/2014/main" id="{7081E902-E760-463B-8778-0CC2D29BF9D4}"/>
+                <a16:creationId xmlns:a16="http://schemas.microsoft.com/office/drawing/2014/main" id="{8BA5D8D5-D570-4A7E-B809-A3D72D0C1AB7}"/>
               </a:ext>
             </a:extLst>
           </p:cNvPr>
@@ -3817,7 +3817,7 @@
           <p:cNvPr id="33" name="section-title-1">
             <a:extLst xmlns:a="http://schemas.openxmlformats.org/drawingml/2006/main">
               <a:ext uri="{FF2B5EF4-FFF2-40B4-BE49-F238E27FC236}">
-                <a16:creationId xmlns:a16="http://schemas.microsoft.com/office/drawing/2014/main" id="{C5570F48-4417-4814-9E7F-C64131C0CE86}"/>
+                <a16:creationId xmlns:a16="http://schemas.microsoft.com/office/drawing/2014/main" id="{D22ADF62-A90B-4772-989F-CF77CED8C564}"/>
               </a:ext>
             </a:extLst>
           </p:cNvPr>
@@ -3872,7 +3872,7 @@
           <p:cNvPr id="34" name="section-1-item-0">
             <a:extLst xmlns:a="http://schemas.openxmlformats.org/drawingml/2006/main">
               <a:ext uri="{FF2B5EF4-FFF2-40B4-BE49-F238E27FC236}">
-                <a16:creationId xmlns:a16="http://schemas.microsoft.com/office/drawing/2014/main" id="{23C3E8CF-ED86-493C-9C52-E5C6A20F0B36}"/>
+                <a16:creationId xmlns:a16="http://schemas.microsoft.com/office/drawing/2014/main" id="{AACB0BB4-4C62-417B-8A9B-05AA0BFFD644}"/>
               </a:ext>
             </a:extLst>
           </p:cNvPr>
@@ -3925,7 +3925,7 @@
           <p:cNvPr id="35" name="section-1-item-1">
             <a:extLst xmlns:a="http://schemas.openxmlformats.org/drawingml/2006/main">
               <a:ext uri="{FF2B5EF4-FFF2-40B4-BE49-F238E27FC236}">
-                <a16:creationId xmlns:a16="http://schemas.microsoft.com/office/drawing/2014/main" id="{68ADBEAD-3DD5-4AB6-BDF0-76AAF42B37B0}"/>
+                <a16:creationId xmlns:a16="http://schemas.microsoft.com/office/drawing/2014/main" id="{5A923B51-511A-4A81-9F6C-E10D6FAC5418}"/>
               </a:ext>
             </a:extLst>
           </p:cNvPr>
@@ -3978,7 +3978,7 @@
           <p:cNvPr id="36" name="section-1-item-2">
             <a:extLst xmlns:a="http://schemas.openxmlformats.org/drawingml/2006/main">
               <a:ext uri="{FF2B5EF4-FFF2-40B4-BE49-F238E27FC236}">
-                <a16:creationId xmlns:a16="http://schemas.microsoft.com/office/drawing/2014/main" id="{F108EE80-6D8F-4F58-955A-74E41A4656F4}"/>
+                <a16:creationId xmlns:a16="http://schemas.microsoft.com/office/drawing/2014/main" id="{C120F104-F7A2-454D-A753-45F9825C0741}"/>
               </a:ext>
             </a:extLst>
           </p:cNvPr>
@@ -4031,7 +4031,7 @@
           <p:cNvPr id="37" name="section-title-2">
             <a:extLst xmlns:a="http://schemas.openxmlformats.org/drawingml/2006/main">
               <a:ext uri="{FF2B5EF4-FFF2-40B4-BE49-F238E27FC236}">
-                <a16:creationId xmlns:a16="http://schemas.microsoft.com/office/drawing/2014/main" id="{9A756446-8F7B-454A-A5DA-93B072DC3F10}"/>
+                <a16:creationId xmlns:a16="http://schemas.microsoft.com/office/drawing/2014/main" id="{ECC4CD24-34C9-4806-8D44-FC61BDE2D49B}"/>
               </a:ext>
             </a:extLst>
           </p:cNvPr>
@@ -4086,7 +4086,7 @@
           <p:cNvPr id="38" name="section-2-item-0">
             <a:extLst xmlns:a="http://schemas.openxmlformats.org/drawingml/2006/main">
               <a:ext uri="{FF2B5EF4-FFF2-40B4-BE49-F238E27FC236}">
-                <a16:creationId xmlns:a16="http://schemas.microsoft.com/office/drawing/2014/main" id="{88486483-BF46-4FA7-9117-9351B576A050}"/>
+                <a16:creationId xmlns:a16="http://schemas.microsoft.com/office/drawing/2014/main" id="{B3DF0C22-4314-4E77-B6A2-7E6840BC76CF}"/>
               </a:ext>
             </a:extLst>
           </p:cNvPr>
@@ -4139,7 +4139,7 @@
           <p:cNvPr id="39" name="section-2-item-1">
             <a:extLst xmlns:a="http://schemas.openxmlformats.org/drawingml/2006/main">
               <a:ext uri="{FF2B5EF4-FFF2-40B4-BE49-F238E27FC236}">
-                <a16:creationId xmlns:a16="http://schemas.microsoft.com/office/drawing/2014/main" id="{3CDC0715-D21C-4BD9-9318-8CF4656C90EF}"/>
+                <a16:creationId xmlns:a16="http://schemas.microsoft.com/office/drawing/2014/main" id="{4E9EA74D-B4C0-49C4-A6DD-082AA89C718B}"/>
               </a:ext>
             </a:extLst>
           </p:cNvPr>
@@ -4192,7 +4192,7 @@
           <p:cNvPr id="40" name="section-2-item-2">
             <a:extLst xmlns:a="http://schemas.openxmlformats.org/drawingml/2006/main">
               <a:ext uri="{FF2B5EF4-FFF2-40B4-BE49-F238E27FC236}">
-                <a16:creationId xmlns:a16="http://schemas.microsoft.com/office/drawing/2014/main" id="{81296B87-7B22-4FE2-86F6-012AE80C61B0}"/>
+                <a16:creationId xmlns:a16="http://schemas.microsoft.com/office/drawing/2014/main" id="{97CA60AC-6B88-42E7-8C64-D1E1C5F3FCCB}"/>
               </a:ext>
             </a:extLst>
           </p:cNvPr>
@@ -4243,7 +4243,7 @@
     </p:spTree>
     <p:extLst>
       <p:ext uri="{BB962C8B-B14F-4D97-AF65-F5344CB8AC3E}">
-        <p14:creationId xmlns:p14="http://schemas.microsoft.com/office/powerpoint/2010/main" val="224996214"/>
+        <p14:creationId xmlns:p14="http://schemas.microsoft.com/office/powerpoint/2010/main" val="888957987"/>
       </p:ext>
     </p:extLst>
   </p:cSld>
@@ -4274,7 +4274,7 @@
           <p:cNvPr id="50" name="header-shadow-line">
             <a:extLst xmlns:a="http://schemas.openxmlformats.org/drawingml/2006/main">
               <a:ext uri="{FF2B5EF4-FFF2-40B4-BE49-F238E27FC236}">
-                <a16:creationId xmlns:a16="http://schemas.microsoft.com/office/drawing/2014/main" id="{AE3A4CEE-39F9-4423-B5AE-9BFA23C6012A}"/>
+                <a16:creationId xmlns:a16="http://schemas.microsoft.com/office/drawing/2014/main" id="{F3028CBF-ABDD-4DE5-A114-058D14D1C1C7}"/>
               </a:ext>
             </a:extLst>
           </p:cNvPr>
@@ -4305,7 +4305,7 @@
           <p:cNvPr id="2" name="header-green-line">
             <a:extLst xmlns:a="http://schemas.openxmlformats.org/drawingml/2006/main">
               <a:ext uri="{FF2B5EF4-FFF2-40B4-BE49-F238E27FC236}">
-                <a16:creationId xmlns:a16="http://schemas.microsoft.com/office/drawing/2014/main" id="{DC81A3B1-770F-4C71-9539-0917BE5E4F1E}"/>
+                <a16:creationId xmlns:a16="http://schemas.microsoft.com/office/drawing/2014/main" id="{46BC8110-18CF-427E-B127-5AF7DA7DDD7A}"/>
               </a:ext>
             </a:extLst>
           </p:cNvPr>
@@ -4336,7 +4336,7 @@
           <p:cNvPr id="3" name="page-number-block">
             <a:extLst xmlns:a="http://schemas.openxmlformats.org/drawingml/2006/main">
               <a:ext uri="{FF2B5EF4-FFF2-40B4-BE49-F238E27FC236}">
-                <a16:creationId xmlns:a16="http://schemas.microsoft.com/office/drawing/2014/main" id="{BAE93B90-07E7-4E50-8843-67214789D8CA}"/>
+                <a16:creationId xmlns:a16="http://schemas.microsoft.com/office/drawing/2014/main" id="{D36101B8-0A0C-42E0-B689-10335F0DFAEA}"/>
               </a:ext>
             </a:extLst>
           </p:cNvPr>
@@ -4367,7 +4367,7 @@
           <p:cNvPr id="4" name="page-number">
             <a:extLst xmlns:a="http://schemas.openxmlformats.org/drawingml/2006/main">
               <a:ext uri="{FF2B5EF4-FFF2-40B4-BE49-F238E27FC236}">
-                <a16:creationId xmlns:a16="http://schemas.microsoft.com/office/drawing/2014/main" id="{1A429E8C-B883-4A1F-BE92-D66DCDD20CA5}"/>
+                <a16:creationId xmlns:a16="http://schemas.microsoft.com/office/drawing/2014/main" id="{2031D0D1-9CD6-4838-8476-FC6DA2F728C2}"/>
               </a:ext>
             </a:extLst>
           </p:cNvPr>
@@ -4420,7 +4420,7 @@
           <p:cNvPr id="5" name="page-title">
             <a:extLst xmlns:a="http://schemas.openxmlformats.org/drawingml/2006/main">
               <a:ext uri="{FF2B5EF4-FFF2-40B4-BE49-F238E27FC236}">
-                <a16:creationId xmlns:a16="http://schemas.microsoft.com/office/drawing/2014/main" id="{2B3EA4D4-D153-4815-A375-6EA31CD4ACE4}"/>
+                <a16:creationId xmlns:a16="http://schemas.microsoft.com/office/drawing/2014/main" id="{BFFC1D44-508F-4C47-8E95-3579E1A23EC9}"/>
               </a:ext>
             </a:extLst>
           </p:cNvPr>
@@ -4473,7 +4473,7 @@
           <p:cNvPr id="6" name="brand-wordmark">
             <a:extLst xmlns:a="http://schemas.openxmlformats.org/drawingml/2006/main">
               <a:ext uri="{FF2B5EF4-FFF2-40B4-BE49-F238E27FC236}">
-                <a16:creationId xmlns:a16="http://schemas.microsoft.com/office/drawing/2014/main" id="{52469A3F-89ED-441D-8CC1-B5AED850CBA0}"/>
+                <a16:creationId xmlns:a16="http://schemas.microsoft.com/office/drawing/2014/main" id="{954A0761-9B74-4185-B3EF-FDDE06F47CCC}"/>
               </a:ext>
             </a:extLst>
           </p:cNvPr>
@@ -4526,7 +4526,7 @@
           <p:cNvPr id="7" name="internal-notice">
             <a:extLst xmlns:a="http://schemas.openxmlformats.org/drawingml/2006/main">
               <a:ext uri="{FF2B5EF4-FFF2-40B4-BE49-F238E27FC236}">
-                <a16:creationId xmlns:a16="http://schemas.microsoft.com/office/drawing/2014/main" id="{74DF481B-9CD2-4781-A12A-632030F2EB3F}"/>
+                <a16:creationId xmlns:a16="http://schemas.microsoft.com/office/drawing/2014/main" id="{7A6531C2-230F-4DD6-BC2B-6A4C0855F354}"/>
               </a:ext>
             </a:extLst>
           </p:cNvPr>
@@ -4579,7 +4579,7 @@
           <p:cNvPr id="8" name="combination-head-0-surface">
             <a:extLst xmlns:a="http://schemas.openxmlformats.org/drawingml/2006/main">
               <a:ext uri="{FF2B5EF4-FFF2-40B4-BE49-F238E27FC236}">
-                <a16:creationId xmlns:a16="http://schemas.microsoft.com/office/drawing/2014/main" id="{EB57DE1F-DFFC-4125-B3E4-FC4D86D83DC7}"/>
+                <a16:creationId xmlns:a16="http://schemas.microsoft.com/office/drawing/2014/main" id="{CFE034DF-89B7-42D9-8777-0A1A81310153}"/>
               </a:ext>
             </a:extLst>
           </p:cNvPr>
@@ -4612,7 +4612,7 @@
           <p:cNvPr id="9" name="combination-head-0-text">
             <a:extLst xmlns:a="http://schemas.openxmlformats.org/drawingml/2006/main">
               <a:ext uri="{FF2B5EF4-FFF2-40B4-BE49-F238E27FC236}">
-                <a16:creationId xmlns:a16="http://schemas.microsoft.com/office/drawing/2014/main" id="{1F948C75-160D-447B-AE83-E53901C4DD1E}"/>
+                <a16:creationId xmlns:a16="http://schemas.microsoft.com/office/drawing/2014/main" id="{20D4DD8A-FDE6-400A-BCC1-5D3F6958CE86}"/>
               </a:ext>
             </a:extLst>
           </p:cNvPr>
@@ -4665,7 +4665,7 @@
           <p:cNvPr id="10" name="combination-head-1-surface">
             <a:extLst xmlns:a="http://schemas.openxmlformats.org/drawingml/2006/main">
               <a:ext uri="{FF2B5EF4-FFF2-40B4-BE49-F238E27FC236}">
-                <a16:creationId xmlns:a16="http://schemas.microsoft.com/office/drawing/2014/main" id="{EFC808C9-920C-45E4-B079-046AD09F51EE}"/>
+                <a16:creationId xmlns:a16="http://schemas.microsoft.com/office/drawing/2014/main" id="{E13FABDA-8936-4B60-910D-6EF770952AA6}"/>
               </a:ext>
             </a:extLst>
           </p:cNvPr>
@@ -4698,7 +4698,7 @@
           <p:cNvPr id="11" name="combination-head-1-text">
             <a:extLst xmlns:a="http://schemas.openxmlformats.org/drawingml/2006/main">
               <a:ext uri="{FF2B5EF4-FFF2-40B4-BE49-F238E27FC236}">
-                <a16:creationId xmlns:a16="http://schemas.microsoft.com/office/drawing/2014/main" id="{9BCFE6BF-70C1-4FBF-8B41-EDDD645B34F2}"/>
+                <a16:creationId xmlns:a16="http://schemas.microsoft.com/office/drawing/2014/main" id="{2D6B04F4-DD21-4931-B3D8-47DCADE929F8}"/>
               </a:ext>
             </a:extLst>
           </p:cNvPr>
@@ -4751,7 +4751,7 @@
           <p:cNvPr id="12" name="combination-head-2-surface">
             <a:extLst xmlns:a="http://schemas.openxmlformats.org/drawingml/2006/main">
               <a:ext uri="{FF2B5EF4-FFF2-40B4-BE49-F238E27FC236}">
-                <a16:creationId xmlns:a16="http://schemas.microsoft.com/office/drawing/2014/main" id="{541F4BED-CD05-4D98-879B-641C505D9106}"/>
+                <a16:creationId xmlns:a16="http://schemas.microsoft.com/office/drawing/2014/main" id="{C139B00E-537F-4BCC-BAC1-1E5FE095F4BD}"/>
               </a:ext>
             </a:extLst>
           </p:cNvPr>
@@ -4784,7 +4784,7 @@
           <p:cNvPr id="13" name="combination-head-2-text">
             <a:extLst xmlns:a="http://schemas.openxmlformats.org/drawingml/2006/main">
               <a:ext uri="{FF2B5EF4-FFF2-40B4-BE49-F238E27FC236}">
-                <a16:creationId xmlns:a16="http://schemas.microsoft.com/office/drawing/2014/main" id="{485C4BAE-0517-499F-8B3B-CBC8BE25A9D1}"/>
+                <a16:creationId xmlns:a16="http://schemas.microsoft.com/office/drawing/2014/main" id="{EB55DBB5-1951-4A57-A4A3-F426C334D9C3}"/>
               </a:ext>
             </a:extLst>
           </p:cNvPr>
@@ -4837,7 +4837,7 @@
           <p:cNvPr id="14" name="combination-head-3-surface">
             <a:extLst xmlns:a="http://schemas.openxmlformats.org/drawingml/2006/main">
               <a:ext uri="{FF2B5EF4-FFF2-40B4-BE49-F238E27FC236}">
-                <a16:creationId xmlns:a16="http://schemas.microsoft.com/office/drawing/2014/main" id="{AFD9F094-5EAD-4AF4-96B4-DAD76D4C2BEC}"/>
+                <a16:creationId xmlns:a16="http://schemas.microsoft.com/office/drawing/2014/main" id="{74B64EA7-667F-4945-BDE0-4740154A75F0}"/>
               </a:ext>
             </a:extLst>
           </p:cNvPr>
@@ -4870,7 +4870,7 @@
           <p:cNvPr id="15" name="combination-head-3-text">
             <a:extLst xmlns:a="http://schemas.openxmlformats.org/drawingml/2006/main">
               <a:ext uri="{FF2B5EF4-FFF2-40B4-BE49-F238E27FC236}">
-                <a16:creationId xmlns:a16="http://schemas.microsoft.com/office/drawing/2014/main" id="{26082DFA-4736-4CEA-A203-85F18C20951D}"/>
+                <a16:creationId xmlns:a16="http://schemas.microsoft.com/office/drawing/2014/main" id="{E5A2F92B-966B-4750-BB8B-DAF19DDA39DE}"/>
               </a:ext>
             </a:extLst>
           </p:cNvPr>
@@ -4923,7 +4923,7 @@
           <p:cNvPr id="16" name="combination-head-4-surface">
             <a:extLst xmlns:a="http://schemas.openxmlformats.org/drawingml/2006/main">
               <a:ext uri="{FF2B5EF4-FFF2-40B4-BE49-F238E27FC236}">
-                <a16:creationId xmlns:a16="http://schemas.microsoft.com/office/drawing/2014/main" id="{422EE94B-BE7B-4460-85BC-30BA74142943}"/>
+                <a16:creationId xmlns:a16="http://schemas.microsoft.com/office/drawing/2014/main" id="{7AEA13FA-B226-401D-9333-4AD58208865D}"/>
               </a:ext>
             </a:extLst>
           </p:cNvPr>
@@ -4956,7 +4956,7 @@
           <p:cNvPr id="17" name="combination-head-4-text">
             <a:extLst xmlns:a="http://schemas.openxmlformats.org/drawingml/2006/main">
               <a:ext uri="{FF2B5EF4-FFF2-40B4-BE49-F238E27FC236}">
-                <a16:creationId xmlns:a16="http://schemas.microsoft.com/office/drawing/2014/main" id="{5A69FAEB-58B6-4161-AC9C-E1A62F4C824D}"/>
+                <a16:creationId xmlns:a16="http://schemas.microsoft.com/office/drawing/2014/main" id="{D2D7E454-4C56-4B34-A24C-059FD373993E}"/>
               </a:ext>
             </a:extLst>
           </p:cNvPr>
@@ -5009,7 +5009,7 @@
           <p:cNvPr id="18" name="combination-scenario-0-surface">
             <a:extLst xmlns:a="http://schemas.openxmlformats.org/drawingml/2006/main">
               <a:ext uri="{FF2B5EF4-FFF2-40B4-BE49-F238E27FC236}">
-                <a16:creationId xmlns:a16="http://schemas.microsoft.com/office/drawing/2014/main" id="{6C204B76-7AC7-4757-AF8F-A55437289870}"/>
+                <a16:creationId xmlns:a16="http://schemas.microsoft.com/office/drawing/2014/main" id="{7D7B4A89-78E8-49EC-A4B3-F3CF20A3FEB3}"/>
               </a:ext>
             </a:extLst>
           </p:cNvPr>
@@ -5042,7 +5042,7 @@
           <p:cNvPr id="19" name="combination-scenario-0-text">
             <a:extLst xmlns:a="http://schemas.openxmlformats.org/drawingml/2006/main">
               <a:ext uri="{FF2B5EF4-FFF2-40B4-BE49-F238E27FC236}">
-                <a16:creationId xmlns:a16="http://schemas.microsoft.com/office/drawing/2014/main" id="{2AEF1B93-01D7-438D-8D58-227C09B1407A}"/>
+                <a16:creationId xmlns:a16="http://schemas.microsoft.com/office/drawing/2014/main" id="{7397024A-ED98-4247-B92F-243C3F7D1F76}"/>
               </a:ext>
             </a:extLst>
           </p:cNvPr>
@@ -5095,7 +5095,7 @@
           <p:cNvPr id="20" name="combination-name-0-surface">
             <a:extLst xmlns:a="http://schemas.openxmlformats.org/drawingml/2006/main">
               <a:ext uri="{FF2B5EF4-FFF2-40B4-BE49-F238E27FC236}">
-                <a16:creationId xmlns:a16="http://schemas.microsoft.com/office/drawing/2014/main" id="{4A29D59A-30F1-4E2E-925D-41B3E9489FA0}"/>
+                <a16:creationId xmlns:a16="http://schemas.microsoft.com/office/drawing/2014/main" id="{987A99CF-2F75-464C-B900-471929C5B8A9}"/>
               </a:ext>
             </a:extLst>
           </p:cNvPr>
@@ -5128,7 +5128,7 @@
           <p:cNvPr id="21" name="combination-name-0-text">
             <a:extLst xmlns:a="http://schemas.openxmlformats.org/drawingml/2006/main">
               <a:ext uri="{FF2B5EF4-FFF2-40B4-BE49-F238E27FC236}">
-                <a16:creationId xmlns:a16="http://schemas.microsoft.com/office/drawing/2014/main" id="{7B967269-E0C5-4306-9D20-ECC7262202EB}"/>
+                <a16:creationId xmlns:a16="http://schemas.microsoft.com/office/drawing/2014/main" id="{2319CA68-6488-488F-8253-41505F4CA237}"/>
               </a:ext>
             </a:extLst>
           </p:cNvPr>
@@ -5181,7 +5181,7 @@
           <p:cNvPr id="22" name="combination-partner-surface-0">
             <a:extLst xmlns:a="http://schemas.openxmlformats.org/drawingml/2006/main">
               <a:ext uri="{FF2B5EF4-FFF2-40B4-BE49-F238E27FC236}">
-                <a16:creationId xmlns:a16="http://schemas.microsoft.com/office/drawing/2014/main" id="{2F56E9FC-690E-408A-A13E-8DA68B73D924}"/>
+                <a16:creationId xmlns:a16="http://schemas.microsoft.com/office/drawing/2014/main" id="{F14978EA-8526-4919-AA51-8032CAA3E14B}"/>
               </a:ext>
             </a:extLst>
           </p:cNvPr>
@@ -5214,7 +5214,7 @@
           <p:cNvPr id="23" name="partner-slot-0-surface">
             <a:extLst xmlns:a="http://schemas.openxmlformats.org/drawingml/2006/main">
               <a:ext uri="{FF2B5EF4-FFF2-40B4-BE49-F238E27FC236}">
-                <a16:creationId xmlns:a16="http://schemas.microsoft.com/office/drawing/2014/main" id="{0E07151B-72B0-4A2B-B6B4-102F70BE2E3E}"/>
+                <a16:creationId xmlns:a16="http://schemas.microsoft.com/office/drawing/2014/main" id="{23F60573-A963-4732-9ADF-9FDF49439F3C}"/>
               </a:ext>
             </a:extLst>
           </p:cNvPr>
@@ -5247,7 +5247,7 @@
           <p:cNvPr id="24" name="partner-slot-0-label">
             <a:extLst xmlns:a="http://schemas.openxmlformats.org/drawingml/2006/main">
               <a:ext uri="{FF2B5EF4-FFF2-40B4-BE49-F238E27FC236}">
-                <a16:creationId xmlns:a16="http://schemas.microsoft.com/office/drawing/2014/main" id="{9F8BF22E-1E3B-4DAC-82F4-E831D63D80D4}"/>
+                <a16:creationId xmlns:a16="http://schemas.microsoft.com/office/drawing/2014/main" id="{6D4B2A28-D83D-47B3-96AF-641CAA6AC8A5}"/>
               </a:ext>
             </a:extLst>
           </p:cNvPr>
@@ -5320,7 +5320,7 @@
           <p:cNvPr id="25" name="combination-talk-0-surface">
             <a:extLst xmlns:a="http://schemas.openxmlformats.org/drawingml/2006/main">
               <a:ext uri="{FF2B5EF4-FFF2-40B4-BE49-F238E27FC236}">
-                <a16:creationId xmlns:a16="http://schemas.microsoft.com/office/drawing/2014/main" id="{9930D964-065D-40CC-8D80-469F47CE41EA}"/>
+                <a16:creationId xmlns:a16="http://schemas.microsoft.com/office/drawing/2014/main" id="{13007818-0977-4AE4-BF63-9334C0F41AF1}"/>
               </a:ext>
             </a:extLst>
           </p:cNvPr>
@@ -5353,7 +5353,7 @@
           <p:cNvPr id="26" name="combination-talk-0-text">
             <a:extLst xmlns:a="http://schemas.openxmlformats.org/drawingml/2006/main">
               <a:ext uri="{FF2B5EF4-FFF2-40B4-BE49-F238E27FC236}">
-                <a16:creationId xmlns:a16="http://schemas.microsoft.com/office/drawing/2014/main" id="{BE94919D-C4A3-452E-9F55-E7718207D118}"/>
+                <a16:creationId xmlns:a16="http://schemas.microsoft.com/office/drawing/2014/main" id="{E4372ADE-33FC-44D0-ACB3-6B83FF5AF621}"/>
               </a:ext>
             </a:extLst>
           </p:cNvPr>
@@ -5406,7 +5406,7 @@
           <p:cNvPr id="27" name="combination-scenario-1-surface">
             <a:extLst xmlns:a="http://schemas.openxmlformats.org/drawingml/2006/main">
               <a:ext uri="{FF2B5EF4-FFF2-40B4-BE49-F238E27FC236}">
-                <a16:creationId xmlns:a16="http://schemas.microsoft.com/office/drawing/2014/main" id="{28386CB9-98D3-4B7B-93A9-70F046E246C0}"/>
+                <a16:creationId xmlns:a16="http://schemas.microsoft.com/office/drawing/2014/main" id="{C4EF9334-EF48-4E35-8ED5-7A023EC6C136}"/>
               </a:ext>
             </a:extLst>
           </p:cNvPr>
@@ -5439,7 +5439,7 @@
           <p:cNvPr id="28" name="combination-scenario-1-text">
             <a:extLst xmlns:a="http://schemas.openxmlformats.org/drawingml/2006/main">
               <a:ext uri="{FF2B5EF4-FFF2-40B4-BE49-F238E27FC236}">
-                <a16:creationId xmlns:a16="http://schemas.microsoft.com/office/drawing/2014/main" id="{29F4E923-CC03-4CDE-A52F-F6AADDA8C7B4}"/>
+                <a16:creationId xmlns:a16="http://schemas.microsoft.com/office/drawing/2014/main" id="{3BA24BB2-6EE1-41A9-AA6F-BF8FA779F822}"/>
               </a:ext>
             </a:extLst>
           </p:cNvPr>
@@ -5492,7 +5492,7 @@
           <p:cNvPr id="29" name="combination-name-1-surface">
             <a:extLst xmlns:a="http://schemas.openxmlformats.org/drawingml/2006/main">
               <a:ext uri="{FF2B5EF4-FFF2-40B4-BE49-F238E27FC236}">
-                <a16:creationId xmlns:a16="http://schemas.microsoft.com/office/drawing/2014/main" id="{7532D44F-241F-4D78-A834-C86F7A5ADA5E}"/>
+                <a16:creationId xmlns:a16="http://schemas.microsoft.com/office/drawing/2014/main" id="{320020A1-957E-4C1B-8FDC-A72A7ADC2ACE}"/>
               </a:ext>
             </a:extLst>
           </p:cNvPr>
@@ -5525,7 +5525,7 @@
           <p:cNvPr id="30" name="combination-name-1-text">
             <a:extLst xmlns:a="http://schemas.openxmlformats.org/drawingml/2006/main">
               <a:ext uri="{FF2B5EF4-FFF2-40B4-BE49-F238E27FC236}">
-                <a16:creationId xmlns:a16="http://schemas.microsoft.com/office/drawing/2014/main" id="{2AC3C892-DC4C-435E-83D1-F362DEA1D57E}"/>
+                <a16:creationId xmlns:a16="http://schemas.microsoft.com/office/drawing/2014/main" id="{40E6DB3D-52D6-41A4-BD68-1B7ABDD1BF18}"/>
               </a:ext>
             </a:extLst>
           </p:cNvPr>
@@ -5578,7 +5578,7 @@
           <p:cNvPr id="31" name="combination-partner-surface-1">
             <a:extLst xmlns:a="http://schemas.openxmlformats.org/drawingml/2006/main">
               <a:ext uri="{FF2B5EF4-FFF2-40B4-BE49-F238E27FC236}">
-                <a16:creationId xmlns:a16="http://schemas.microsoft.com/office/drawing/2014/main" id="{23D38D02-7E22-4893-9CAA-831D97BE2622}"/>
+                <a16:creationId xmlns:a16="http://schemas.microsoft.com/office/drawing/2014/main" id="{03F50EB9-1D41-49A1-B6AA-51B578B50B84}"/>
               </a:ext>
             </a:extLst>
           </p:cNvPr>
@@ -5611,7 +5611,7 @@
           <p:cNvPr id="32" name="partner-slot-1-surface">
             <a:extLst xmlns:a="http://schemas.openxmlformats.org/drawingml/2006/main">
               <a:ext uri="{FF2B5EF4-FFF2-40B4-BE49-F238E27FC236}">
-                <a16:creationId xmlns:a16="http://schemas.microsoft.com/office/drawing/2014/main" id="{010E2CCA-018F-4CFF-8A2C-B2480BAF24CD}"/>
+                <a16:creationId xmlns:a16="http://schemas.microsoft.com/office/drawing/2014/main" id="{A94B0D61-20DF-4BF0-939B-E9F72AFD1031}"/>
               </a:ext>
             </a:extLst>
           </p:cNvPr>
@@ -5644,7 +5644,7 @@
           <p:cNvPr id="33" name="partner-slot-1-label">
             <a:extLst xmlns:a="http://schemas.openxmlformats.org/drawingml/2006/main">
               <a:ext uri="{FF2B5EF4-FFF2-40B4-BE49-F238E27FC236}">
-                <a16:creationId xmlns:a16="http://schemas.microsoft.com/office/drawing/2014/main" id="{13E80BEA-1106-4639-8133-372BA70C1A0A}"/>
+                <a16:creationId xmlns:a16="http://schemas.microsoft.com/office/drawing/2014/main" id="{22DD06FD-9E7E-493C-B21D-E8E20DB5E724}"/>
               </a:ext>
             </a:extLst>
           </p:cNvPr>
@@ -5717,7 +5717,7 @@
           <p:cNvPr id="34" name="combination-talk-1-surface">
             <a:extLst xmlns:a="http://schemas.openxmlformats.org/drawingml/2006/main">
               <a:ext uri="{FF2B5EF4-FFF2-40B4-BE49-F238E27FC236}">
-                <a16:creationId xmlns:a16="http://schemas.microsoft.com/office/drawing/2014/main" id="{A94E041B-A8E2-4354-B9DF-1A9B916965E9}"/>
+                <a16:creationId xmlns:a16="http://schemas.microsoft.com/office/drawing/2014/main" id="{A5B5237D-8F3C-49DE-B834-CCAEBD0289FD}"/>
               </a:ext>
             </a:extLst>
           </p:cNvPr>
@@ -5750,7 +5750,7 @@
           <p:cNvPr id="35" name="combination-talk-1-text">
             <a:extLst xmlns:a="http://schemas.openxmlformats.org/drawingml/2006/main">
               <a:ext uri="{FF2B5EF4-FFF2-40B4-BE49-F238E27FC236}">
-                <a16:creationId xmlns:a16="http://schemas.microsoft.com/office/drawing/2014/main" id="{833D3EE8-7825-4485-8058-7600EA765CFB}"/>
+                <a16:creationId xmlns:a16="http://schemas.microsoft.com/office/drawing/2014/main" id="{3F6149B3-DF30-4229-AD73-1801564208D3}"/>
               </a:ext>
             </a:extLst>
           </p:cNvPr>
@@ -5803,7 +5803,7 @@
           <p:cNvPr id="36" name="combination-scenario-2-surface">
             <a:extLst xmlns:a="http://schemas.openxmlformats.org/drawingml/2006/main">
               <a:ext uri="{FF2B5EF4-FFF2-40B4-BE49-F238E27FC236}">
-                <a16:creationId xmlns:a16="http://schemas.microsoft.com/office/drawing/2014/main" id="{C7D79AD2-1BC3-46C4-95DF-E6DB9155BCB6}"/>
+                <a16:creationId xmlns:a16="http://schemas.microsoft.com/office/drawing/2014/main" id="{11BD32C0-38C4-4B4E-A1F3-B9705365624C}"/>
               </a:ext>
             </a:extLst>
           </p:cNvPr>
@@ -5836,7 +5836,7 @@
           <p:cNvPr id="37" name="combination-scenario-2-text">
             <a:extLst xmlns:a="http://schemas.openxmlformats.org/drawingml/2006/main">
               <a:ext uri="{FF2B5EF4-FFF2-40B4-BE49-F238E27FC236}">
-                <a16:creationId xmlns:a16="http://schemas.microsoft.com/office/drawing/2014/main" id="{AFE2E3E3-C309-40A4-87CB-E8DF14121B30}"/>
+                <a16:creationId xmlns:a16="http://schemas.microsoft.com/office/drawing/2014/main" id="{F2BEB556-32CE-470A-B476-0B21DE75825E}"/>
               </a:ext>
             </a:extLst>
           </p:cNvPr>
@@ -5889,7 +5889,7 @@
           <p:cNvPr id="38" name="combination-name-2-surface">
             <a:extLst xmlns:a="http://schemas.openxmlformats.org/drawingml/2006/main">
               <a:ext uri="{FF2B5EF4-FFF2-40B4-BE49-F238E27FC236}">
-                <a16:creationId xmlns:a16="http://schemas.microsoft.com/office/drawing/2014/main" id="{F477D51A-AF59-4A23-8624-3AF1BFCB4267}"/>
+                <a16:creationId xmlns:a16="http://schemas.microsoft.com/office/drawing/2014/main" id="{E1E4082A-1D7F-4882-8B37-5BAB2E6981D5}"/>
               </a:ext>
             </a:extLst>
           </p:cNvPr>
@@ -5922,7 +5922,7 @@
           <p:cNvPr id="39" name="combination-name-2-text">
             <a:extLst xmlns:a="http://schemas.openxmlformats.org/drawingml/2006/main">
               <a:ext uri="{FF2B5EF4-FFF2-40B4-BE49-F238E27FC236}">
-                <a16:creationId xmlns:a16="http://schemas.microsoft.com/office/drawing/2014/main" id="{06633851-75B5-49D3-8264-DB85DA9A07BC}"/>
+                <a16:creationId xmlns:a16="http://schemas.microsoft.com/office/drawing/2014/main" id="{9C56F9CC-3971-4872-96D0-D9E3612ABC52}"/>
               </a:ext>
             </a:extLst>
           </p:cNvPr>
@@ -5975,7 +5975,7 @@
           <p:cNvPr id="40" name="combination-partner-surface-2">
             <a:extLst xmlns:a="http://schemas.openxmlformats.org/drawingml/2006/main">
               <a:ext uri="{FF2B5EF4-FFF2-40B4-BE49-F238E27FC236}">
-                <a16:creationId xmlns:a16="http://schemas.microsoft.com/office/drawing/2014/main" id="{57488CDF-E23F-4A10-960C-0A2CEF9A4E81}"/>
+                <a16:creationId xmlns:a16="http://schemas.microsoft.com/office/drawing/2014/main" id="{72A609B9-AB03-432B-920D-89750BBDBCCE}"/>
               </a:ext>
             </a:extLst>
           </p:cNvPr>
@@ -6008,7 +6008,7 @@
           <p:cNvPr id="41" name="partner-slot-2-surface">
             <a:extLst xmlns:a="http://schemas.openxmlformats.org/drawingml/2006/main">
               <a:ext uri="{FF2B5EF4-FFF2-40B4-BE49-F238E27FC236}">
-                <a16:creationId xmlns:a16="http://schemas.microsoft.com/office/drawing/2014/main" id="{D8777EF8-45E3-4D81-93BB-ABB332C8A292}"/>
+                <a16:creationId xmlns:a16="http://schemas.microsoft.com/office/drawing/2014/main" id="{8F86CCA1-52D1-48AE-B9F7-9F501D1CDC0B}"/>
               </a:ext>
             </a:extLst>
           </p:cNvPr>
@@ -6041,7 +6041,7 @@
           <p:cNvPr id="42" name="partner-slot-2-label">
             <a:extLst xmlns:a="http://schemas.openxmlformats.org/drawingml/2006/main">
               <a:ext uri="{FF2B5EF4-FFF2-40B4-BE49-F238E27FC236}">
-                <a16:creationId xmlns:a16="http://schemas.microsoft.com/office/drawing/2014/main" id="{A9B8E702-A930-4F93-A727-D9E6834E8BCC}"/>
+                <a16:creationId xmlns:a16="http://schemas.microsoft.com/office/drawing/2014/main" id="{9DFFBB5F-0843-499E-852E-553047777ED5}"/>
               </a:ext>
             </a:extLst>
           </p:cNvPr>
@@ -6114,7 +6114,7 @@
           <p:cNvPr id="43" name="combination-talk-2-surface">
             <a:extLst xmlns:a="http://schemas.openxmlformats.org/drawingml/2006/main">
               <a:ext uri="{FF2B5EF4-FFF2-40B4-BE49-F238E27FC236}">
-                <a16:creationId xmlns:a16="http://schemas.microsoft.com/office/drawing/2014/main" id="{A1B3AE75-A846-4066-AE22-4F2C7CF0852B}"/>
+                <a16:creationId xmlns:a16="http://schemas.microsoft.com/office/drawing/2014/main" id="{9A02948E-DC00-4076-B431-FC38798BABB4}"/>
               </a:ext>
             </a:extLst>
           </p:cNvPr>
@@ -6147,7 +6147,7 @@
           <p:cNvPr id="44" name="combination-talk-2-text">
             <a:extLst xmlns:a="http://schemas.openxmlformats.org/drawingml/2006/main">
               <a:ext uri="{FF2B5EF4-FFF2-40B4-BE49-F238E27FC236}">
-                <a16:creationId xmlns:a16="http://schemas.microsoft.com/office/drawing/2014/main" id="{14584591-CAE1-4EC9-92F0-0E8FBA4BA89E}"/>
+                <a16:creationId xmlns:a16="http://schemas.microsoft.com/office/drawing/2014/main" id="{97F75554-9245-40FB-8BBF-C545F675B878}"/>
               </a:ext>
             </a:extLst>
           </p:cNvPr>
@@ -6200,7 +6200,7 @@
           <p:cNvPr id="45" name="combination-primary-merge-surface">
             <a:extLst xmlns:a="http://schemas.openxmlformats.org/drawingml/2006/main">
               <a:ext uri="{FF2B5EF4-FFF2-40B4-BE49-F238E27FC236}">
-                <a16:creationId xmlns:a16="http://schemas.microsoft.com/office/drawing/2014/main" id="{792E75C5-F2ED-4C0C-84F8-8209DF34E0C2}"/>
+                <a16:creationId xmlns:a16="http://schemas.microsoft.com/office/drawing/2014/main" id="{B972EA83-F9FC-4D3A-A952-B743077B1F60}"/>
               </a:ext>
             </a:extLst>
           </p:cNvPr>
@@ -6233,7 +6233,7 @@
           <p:cNvPr id="46" name="combination-primary-divider">
             <a:extLst xmlns:a="http://schemas.openxmlformats.org/drawingml/2006/main">
               <a:ext uri="{FF2B5EF4-FFF2-40B4-BE49-F238E27FC236}">
-                <a16:creationId xmlns:a16="http://schemas.microsoft.com/office/drawing/2014/main" id="{ED303674-8D54-4F6F-8442-736D44813577}"/>
+                <a16:creationId xmlns:a16="http://schemas.microsoft.com/office/drawing/2014/main" id="{9459A425-333D-44B0-A929-8559F681CF6C}"/>
               </a:ext>
             </a:extLst>
           </p:cNvPr>
@@ -6264,7 +6264,7 @@
           <p:cNvPr id="47" name="combination-plus">
             <a:extLst xmlns:a="http://schemas.openxmlformats.org/drawingml/2006/main">
               <a:ext uri="{FF2B5EF4-FFF2-40B4-BE49-F238E27FC236}">
-                <a16:creationId xmlns:a16="http://schemas.microsoft.com/office/drawing/2014/main" id="{C42B370A-504F-4E02-BC0F-688AE3976856}"/>
+                <a16:creationId xmlns:a16="http://schemas.microsoft.com/office/drawing/2014/main" id="{651AA28D-B211-4558-A1E9-1C44B264707E}"/>
               </a:ext>
             </a:extLst>
           </p:cNvPr>
@@ -6317,7 +6317,7 @@
           <p:cNvPr id="48" name="combination-primary-product-surface">
             <a:extLst xmlns:a="http://schemas.openxmlformats.org/drawingml/2006/main">
               <a:ext uri="{FF2B5EF4-FFF2-40B4-BE49-F238E27FC236}">
-                <a16:creationId xmlns:a16="http://schemas.microsoft.com/office/drawing/2014/main" id="{6995CE37-11CB-4C56-8382-0D09ABD61A90}"/>
+                <a16:creationId xmlns:a16="http://schemas.microsoft.com/office/drawing/2014/main" id="{0EF9ED74-EBF0-44D0-9778-623827283816}"/>
               </a:ext>
             </a:extLst>
           </p:cNvPr>
@@ -6350,7 +6350,7 @@
           <p:cNvPr id="49" name="combination-primary-product-label">
             <a:extLst xmlns:a="http://schemas.openxmlformats.org/drawingml/2006/main">
               <a:ext uri="{FF2B5EF4-FFF2-40B4-BE49-F238E27FC236}">
-                <a16:creationId xmlns:a16="http://schemas.microsoft.com/office/drawing/2014/main" id="{0AC73A51-F5B7-4227-AB87-518A7AA5DB96}"/>
+                <a16:creationId xmlns:a16="http://schemas.microsoft.com/office/drawing/2014/main" id="{018EA3BC-42DE-4131-A967-3A0CBBCC46A0}"/>
               </a:ext>
             </a:extLst>
           </p:cNvPr>
@@ -6421,7 +6421,7 @@
     </p:spTree>
     <p:extLst>
       <p:ext uri="{BB962C8B-B14F-4D97-AF65-F5344CB8AC3E}">
-        <p14:creationId xmlns:p14="http://schemas.microsoft.com/office/powerpoint/2010/main" val="700284087"/>
+        <p14:creationId xmlns:p14="http://schemas.microsoft.com/office/powerpoint/2010/main" val="259707909"/>
       </p:ext>
     </p:extLst>
   </p:cSld>
@@ -6452,7 +6452,7 @@
           <p:cNvPr id="42" name="header-shadow-line">
             <a:extLst xmlns:a="http://schemas.openxmlformats.org/drawingml/2006/main">
               <a:ext uri="{FF2B5EF4-FFF2-40B4-BE49-F238E27FC236}">
-                <a16:creationId xmlns:a16="http://schemas.microsoft.com/office/drawing/2014/main" id="{DC3F69CE-0280-4DB0-B72F-39AE57DC9DD9}"/>
+                <a16:creationId xmlns:a16="http://schemas.microsoft.com/office/drawing/2014/main" id="{20332979-083C-43B3-948B-BEC39A5D9CE6}"/>
               </a:ext>
             </a:extLst>
           </p:cNvPr>
@@ -6483,7 +6483,7 @@
           <p:cNvPr id="2" name="header-green-line">
             <a:extLst xmlns:a="http://schemas.openxmlformats.org/drawingml/2006/main">
               <a:ext uri="{FF2B5EF4-FFF2-40B4-BE49-F238E27FC236}">
-                <a16:creationId xmlns:a16="http://schemas.microsoft.com/office/drawing/2014/main" id="{22D9E253-35CD-4F79-BA0C-57DB3F7B1069}"/>
+                <a16:creationId xmlns:a16="http://schemas.microsoft.com/office/drawing/2014/main" id="{16B3C0D3-041B-4472-8CDF-803B794B3313}"/>
               </a:ext>
             </a:extLst>
           </p:cNvPr>
@@ -6514,7 +6514,7 @@
           <p:cNvPr id="3" name="page-number-block">
             <a:extLst xmlns:a="http://schemas.openxmlformats.org/drawingml/2006/main">
               <a:ext uri="{FF2B5EF4-FFF2-40B4-BE49-F238E27FC236}">
-                <a16:creationId xmlns:a16="http://schemas.microsoft.com/office/drawing/2014/main" id="{0F890E6C-B98E-476D-A282-A1436AAA2E30}"/>
+                <a16:creationId xmlns:a16="http://schemas.microsoft.com/office/drawing/2014/main" id="{D64FAB19-1D6C-4504-9BCA-9F931F617640}"/>
               </a:ext>
             </a:extLst>
           </p:cNvPr>
@@ -6545,7 +6545,7 @@
           <p:cNvPr id="4" name="page-number">
             <a:extLst xmlns:a="http://schemas.openxmlformats.org/drawingml/2006/main">
               <a:ext uri="{FF2B5EF4-FFF2-40B4-BE49-F238E27FC236}">
-                <a16:creationId xmlns:a16="http://schemas.microsoft.com/office/drawing/2014/main" id="{EC181753-DBF7-4AD4-8AE7-653A80A6E183}"/>
+                <a16:creationId xmlns:a16="http://schemas.microsoft.com/office/drawing/2014/main" id="{299E9EB3-B6F4-4470-9BC2-76A82B0EDCCE}"/>
               </a:ext>
             </a:extLst>
           </p:cNvPr>
@@ -6598,7 +6598,7 @@
           <p:cNvPr id="5" name="page-title">
             <a:extLst xmlns:a="http://schemas.openxmlformats.org/drawingml/2006/main">
               <a:ext uri="{FF2B5EF4-FFF2-40B4-BE49-F238E27FC236}">
-                <a16:creationId xmlns:a16="http://schemas.microsoft.com/office/drawing/2014/main" id="{7DB7262B-35DE-4DAF-942B-5CC2205B3DD9}"/>
+                <a16:creationId xmlns:a16="http://schemas.microsoft.com/office/drawing/2014/main" id="{5588174D-5A15-4166-9EE6-14A46411840E}"/>
               </a:ext>
             </a:extLst>
           </p:cNvPr>
@@ -6651,7 +6651,7 @@
           <p:cNvPr id="6" name="brand-wordmark">
             <a:extLst xmlns:a="http://schemas.openxmlformats.org/drawingml/2006/main">
               <a:ext uri="{FF2B5EF4-FFF2-40B4-BE49-F238E27FC236}">
-                <a16:creationId xmlns:a16="http://schemas.microsoft.com/office/drawing/2014/main" id="{D8F9C872-58DD-4C00-BB82-50CA23AC2965}"/>
+                <a16:creationId xmlns:a16="http://schemas.microsoft.com/office/drawing/2014/main" id="{56089812-5CE1-443B-9023-3F5F0FF49154}"/>
               </a:ext>
             </a:extLst>
           </p:cNvPr>
@@ -6704,7 +6704,7 @@
           <p:cNvPr id="7" name="internal-notice">
             <a:extLst xmlns:a="http://schemas.openxmlformats.org/drawingml/2006/main">
               <a:ext uri="{FF2B5EF4-FFF2-40B4-BE49-F238E27FC236}">
-                <a16:creationId xmlns:a16="http://schemas.microsoft.com/office/drawing/2014/main" id="{AB89C3D0-E564-47D4-AB61-458C8E2F6FA5}"/>
+                <a16:creationId xmlns:a16="http://schemas.microsoft.com/office/drawing/2014/main" id="{276BA87D-0213-4FD4-BF82-E41551714488}"/>
               </a:ext>
             </a:extLst>
           </p:cNvPr>
@@ -6757,7 +6757,7 @@
           <p:cNvPr id="8" name="benchmark-head-0-surface">
             <a:extLst xmlns:a="http://schemas.openxmlformats.org/drawingml/2006/main">
               <a:ext uri="{FF2B5EF4-FFF2-40B4-BE49-F238E27FC236}">
-                <a16:creationId xmlns:a16="http://schemas.microsoft.com/office/drawing/2014/main" id="{EB0FEA3C-9161-4351-9930-C2152634E997}"/>
+                <a16:creationId xmlns:a16="http://schemas.microsoft.com/office/drawing/2014/main" id="{6FF0AC2C-8063-481B-ACC1-9EE7B373EAC0}"/>
               </a:ext>
             </a:extLst>
           </p:cNvPr>
@@ -6790,7 +6790,7 @@
           <p:cNvPr id="9" name="benchmark-head-0-text">
             <a:extLst xmlns:a="http://schemas.openxmlformats.org/drawingml/2006/main">
               <a:ext uri="{FF2B5EF4-FFF2-40B4-BE49-F238E27FC236}">
-                <a16:creationId xmlns:a16="http://schemas.microsoft.com/office/drawing/2014/main" id="{12432136-2364-457B-9E3A-6EEECDE03D80}"/>
+                <a16:creationId xmlns:a16="http://schemas.microsoft.com/office/drawing/2014/main" id="{D420D62B-074F-4927-B532-BBA761AFD073}"/>
               </a:ext>
             </a:extLst>
           </p:cNvPr>
@@ -6843,7 +6843,7 @@
           <p:cNvPr id="10" name="benchmark-head-1-surface">
             <a:extLst xmlns:a="http://schemas.openxmlformats.org/drawingml/2006/main">
               <a:ext uri="{FF2B5EF4-FFF2-40B4-BE49-F238E27FC236}">
-                <a16:creationId xmlns:a16="http://schemas.microsoft.com/office/drawing/2014/main" id="{935D851E-7AC7-4B36-8A1C-265884D49955}"/>
+                <a16:creationId xmlns:a16="http://schemas.microsoft.com/office/drawing/2014/main" id="{80234700-60A2-451E-A438-67B7D49B9832}"/>
               </a:ext>
             </a:extLst>
           </p:cNvPr>
@@ -6876,7 +6876,7 @@
           <p:cNvPr id="11" name="benchmark-head-1-text">
             <a:extLst xmlns:a="http://schemas.openxmlformats.org/drawingml/2006/main">
               <a:ext uri="{FF2B5EF4-FFF2-40B4-BE49-F238E27FC236}">
-                <a16:creationId xmlns:a16="http://schemas.microsoft.com/office/drawing/2014/main" id="{42DA3EB0-EC47-4D0A-A949-F6A937C9BEF3}"/>
+                <a16:creationId xmlns:a16="http://schemas.microsoft.com/office/drawing/2014/main" id="{A63CE258-B3AF-47CC-919E-C114D26D6631}"/>
               </a:ext>
             </a:extLst>
           </p:cNvPr>
@@ -6929,7 +6929,7 @@
           <p:cNvPr id="12" name="benchmark-head-2-surface">
             <a:extLst xmlns:a="http://schemas.openxmlformats.org/drawingml/2006/main">
               <a:ext uri="{FF2B5EF4-FFF2-40B4-BE49-F238E27FC236}">
-                <a16:creationId xmlns:a16="http://schemas.microsoft.com/office/drawing/2014/main" id="{EEE051CA-73C3-4E0C-8220-B0663D32989A}"/>
+                <a16:creationId xmlns:a16="http://schemas.microsoft.com/office/drawing/2014/main" id="{D91134F2-6A04-4C83-B631-7549F5A69E45}"/>
               </a:ext>
             </a:extLst>
           </p:cNvPr>
@@ -6962,7 +6962,7 @@
           <p:cNvPr id="13" name="benchmark-head-2-text">
             <a:extLst xmlns:a="http://schemas.openxmlformats.org/drawingml/2006/main">
               <a:ext uri="{FF2B5EF4-FFF2-40B4-BE49-F238E27FC236}">
-                <a16:creationId xmlns:a16="http://schemas.microsoft.com/office/drawing/2014/main" id="{1ABAB97B-71F4-4AC7-BBB3-BC95A0BDC755}"/>
+                <a16:creationId xmlns:a16="http://schemas.microsoft.com/office/drawing/2014/main" id="{F33C258C-A1A3-40FE-A634-8984DD1A37C4}"/>
               </a:ext>
             </a:extLst>
           </p:cNvPr>
@@ -7015,7 +7015,7 @@
           <p:cNvPr id="14" name="benchmark-label-0-surface">
             <a:extLst xmlns:a="http://schemas.openxmlformats.org/drawingml/2006/main">
               <a:ext uri="{FF2B5EF4-FFF2-40B4-BE49-F238E27FC236}">
-                <a16:creationId xmlns:a16="http://schemas.microsoft.com/office/drawing/2014/main" id="{127286C2-DCBD-4A3D-8F92-427B7090887D}"/>
+                <a16:creationId xmlns:a16="http://schemas.microsoft.com/office/drawing/2014/main" id="{808146D0-A93F-4938-972F-E0EEFB73EF8A}"/>
               </a:ext>
             </a:extLst>
           </p:cNvPr>
@@ -7048,7 +7048,7 @@
           <p:cNvPr id="15" name="benchmark-label-0-text">
             <a:extLst xmlns:a="http://schemas.openxmlformats.org/drawingml/2006/main">
               <a:ext uri="{FF2B5EF4-FFF2-40B4-BE49-F238E27FC236}">
-                <a16:creationId xmlns:a16="http://schemas.microsoft.com/office/drawing/2014/main" id="{5C364A86-1C11-446B-88D0-C43D7CEDECD3}"/>
+                <a16:creationId xmlns:a16="http://schemas.microsoft.com/office/drawing/2014/main" id="{65A50B08-1CE2-44B3-ADEB-BAC8780F1748}"/>
               </a:ext>
             </a:extLst>
           </p:cNvPr>
@@ -7101,7 +7101,7 @@
           <p:cNvPr id="16" name="benchmark-product-left-cell">
             <a:extLst xmlns:a="http://schemas.openxmlformats.org/drawingml/2006/main">
               <a:ext uri="{FF2B5EF4-FFF2-40B4-BE49-F238E27FC236}">
-                <a16:creationId xmlns:a16="http://schemas.microsoft.com/office/drawing/2014/main" id="{D5E12809-6DFF-41D7-87B1-C660705F31D8}"/>
+                <a16:creationId xmlns:a16="http://schemas.microsoft.com/office/drawing/2014/main" id="{D73D4219-5B0C-40CF-8D22-8AD9B1113148}"/>
               </a:ext>
             </a:extLst>
           </p:cNvPr>
@@ -7134,7 +7134,7 @@
           <p:cNvPr id="17" name="benchmark-product-right-cell">
             <a:extLst xmlns:a="http://schemas.openxmlformats.org/drawingml/2006/main">
               <a:ext uri="{FF2B5EF4-FFF2-40B4-BE49-F238E27FC236}">
-                <a16:creationId xmlns:a16="http://schemas.microsoft.com/office/drawing/2014/main" id="{A676687F-4FDB-46C4-9B38-F77748EFF32A}"/>
+                <a16:creationId xmlns:a16="http://schemas.microsoft.com/office/drawing/2014/main" id="{789EC4A0-6A4D-46BD-900A-0A6DB9885C0D}"/>
               </a:ext>
             </a:extLst>
           </p:cNvPr>
@@ -7167,7 +7167,7 @@
           <p:cNvPr id="18" name="benchmark-primary-packshot-surface">
             <a:extLst xmlns:a="http://schemas.openxmlformats.org/drawingml/2006/main">
               <a:ext uri="{FF2B5EF4-FFF2-40B4-BE49-F238E27FC236}">
-                <a16:creationId xmlns:a16="http://schemas.microsoft.com/office/drawing/2014/main" id="{9C823811-F25B-4B80-B2B0-FF12A303DA79}"/>
+                <a16:creationId xmlns:a16="http://schemas.microsoft.com/office/drawing/2014/main" id="{8EEB00A9-4B27-4AFB-83F9-BBE9FF0AF414}"/>
               </a:ext>
             </a:extLst>
           </p:cNvPr>
@@ -7200,7 +7200,7 @@
           <p:cNvPr id="19" name="benchmark-primary-packshot-label">
             <a:extLst xmlns:a="http://schemas.openxmlformats.org/drawingml/2006/main">
               <a:ext uri="{FF2B5EF4-FFF2-40B4-BE49-F238E27FC236}">
-                <a16:creationId xmlns:a16="http://schemas.microsoft.com/office/drawing/2014/main" id="{14C59D85-5361-4DE2-916E-FE619A75CF26}"/>
+                <a16:creationId xmlns:a16="http://schemas.microsoft.com/office/drawing/2014/main" id="{B0E2D792-6515-4B31-8105-F94BE1639316}"/>
               </a:ext>
             </a:extLst>
           </p:cNvPr>
@@ -7273,7 +7273,7 @@
           <p:cNvPr id="20" name="benchmark-competitor-packshot-surface">
             <a:extLst xmlns:a="http://schemas.openxmlformats.org/drawingml/2006/main">
               <a:ext uri="{FF2B5EF4-FFF2-40B4-BE49-F238E27FC236}">
-                <a16:creationId xmlns:a16="http://schemas.microsoft.com/office/drawing/2014/main" id="{1A1500C2-E7BB-4F19-8289-92BDC0E788EA}"/>
+                <a16:creationId xmlns:a16="http://schemas.microsoft.com/office/drawing/2014/main" id="{0C17CA9F-3A07-4C93-8778-F881BD4829DC}"/>
               </a:ext>
             </a:extLst>
           </p:cNvPr>
@@ -7306,7 +7306,7 @@
           <p:cNvPr id="21" name="benchmark-competitor-packshot-label">
             <a:extLst xmlns:a="http://schemas.openxmlformats.org/drawingml/2006/main">
               <a:ext uri="{FF2B5EF4-FFF2-40B4-BE49-F238E27FC236}">
-                <a16:creationId xmlns:a16="http://schemas.microsoft.com/office/drawing/2014/main" id="{4F80370F-AD26-4959-83D3-21DC15F2F9B3}"/>
+                <a16:creationId xmlns:a16="http://schemas.microsoft.com/office/drawing/2014/main" id="{6581F36C-F8D7-4C67-8E6E-CD6EE7E121EE}"/>
               </a:ext>
             </a:extLst>
           </p:cNvPr>
@@ -7379,7 +7379,7 @@
           <p:cNvPr id="22" name="benchmark-label-1-surface">
             <a:extLst xmlns:a="http://schemas.openxmlformats.org/drawingml/2006/main">
               <a:ext uri="{FF2B5EF4-FFF2-40B4-BE49-F238E27FC236}">
-                <a16:creationId xmlns:a16="http://schemas.microsoft.com/office/drawing/2014/main" id="{A2577484-5230-409F-A079-27F13C12C3FD}"/>
+                <a16:creationId xmlns:a16="http://schemas.microsoft.com/office/drawing/2014/main" id="{02F062C0-71B4-413F-8734-8E8ADA18D54A}"/>
               </a:ext>
             </a:extLst>
           </p:cNvPr>
@@ -7412,7 +7412,7 @@
           <p:cNvPr id="23" name="benchmark-label-1-text">
             <a:extLst xmlns:a="http://schemas.openxmlformats.org/drawingml/2006/main">
               <a:ext uri="{FF2B5EF4-FFF2-40B4-BE49-F238E27FC236}">
-                <a16:creationId xmlns:a16="http://schemas.microsoft.com/office/drawing/2014/main" id="{87EB4463-9429-41DE-9A49-42588C5010A7}"/>
+                <a16:creationId xmlns:a16="http://schemas.microsoft.com/office/drawing/2014/main" id="{F472A183-0E4C-4C56-A465-D0473BAE3C10}"/>
               </a:ext>
             </a:extLst>
           </p:cNvPr>
@@ -7465,7 +7465,7 @@
           <p:cNvPr id="24" name="benchmark-merged-1-surface">
             <a:extLst xmlns:a="http://schemas.openxmlformats.org/drawingml/2006/main">
               <a:ext uri="{FF2B5EF4-FFF2-40B4-BE49-F238E27FC236}">
-                <a16:creationId xmlns:a16="http://schemas.microsoft.com/office/drawing/2014/main" id="{296766B9-3B12-4EC2-97EE-2C7C1BCF3589}"/>
+                <a16:creationId xmlns:a16="http://schemas.microsoft.com/office/drawing/2014/main" id="{337A8204-E689-49D1-B526-EC221BA25325}"/>
               </a:ext>
             </a:extLst>
           </p:cNvPr>
@@ -7498,7 +7498,7 @@
           <p:cNvPr id="25" name="benchmark-merged-1-text">
             <a:extLst xmlns:a="http://schemas.openxmlformats.org/drawingml/2006/main">
               <a:ext uri="{FF2B5EF4-FFF2-40B4-BE49-F238E27FC236}">
-                <a16:creationId xmlns:a16="http://schemas.microsoft.com/office/drawing/2014/main" id="{D7A4CE03-C02D-4FAD-83DE-D119A7DBB628}"/>
+                <a16:creationId xmlns:a16="http://schemas.microsoft.com/office/drawing/2014/main" id="{EB340492-BA0A-49D2-9C32-AB727DC02CFD}"/>
               </a:ext>
             </a:extLst>
           </p:cNvPr>
@@ -7551,7 +7551,7 @@
           <p:cNvPr id="26" name="benchmark-label-2-surface">
             <a:extLst xmlns:a="http://schemas.openxmlformats.org/drawingml/2006/main">
               <a:ext uri="{FF2B5EF4-FFF2-40B4-BE49-F238E27FC236}">
-                <a16:creationId xmlns:a16="http://schemas.microsoft.com/office/drawing/2014/main" id="{EA6ED26D-BCEA-420D-8083-A179712DB11D}"/>
+                <a16:creationId xmlns:a16="http://schemas.microsoft.com/office/drawing/2014/main" id="{9CDC7696-3F48-4DAE-83E6-1E9AB9C1D598}"/>
               </a:ext>
             </a:extLst>
           </p:cNvPr>
@@ -7584,7 +7584,7 @@
           <p:cNvPr id="27" name="benchmark-label-2-text">
             <a:extLst xmlns:a="http://schemas.openxmlformats.org/drawingml/2006/main">
               <a:ext uri="{FF2B5EF4-FFF2-40B4-BE49-F238E27FC236}">
-                <a16:creationId xmlns:a16="http://schemas.microsoft.com/office/drawing/2014/main" id="{0E27BD7C-2C81-4D10-9BC6-C97C18F9929A}"/>
+                <a16:creationId xmlns:a16="http://schemas.microsoft.com/office/drawing/2014/main" id="{5FB896DB-711A-4693-B928-943030214E2F}"/>
               </a:ext>
             </a:extLst>
           </p:cNvPr>
@@ -7637,7 +7637,7 @@
           <p:cNvPr id="28" name="benchmark-merged-2-surface">
             <a:extLst xmlns:a="http://schemas.openxmlformats.org/drawingml/2006/main">
               <a:ext uri="{FF2B5EF4-FFF2-40B4-BE49-F238E27FC236}">
-                <a16:creationId xmlns:a16="http://schemas.microsoft.com/office/drawing/2014/main" id="{0A0ED828-0898-4E3E-B23B-F12A00964779}"/>
+                <a16:creationId xmlns:a16="http://schemas.microsoft.com/office/drawing/2014/main" id="{204ED4F0-EA82-4D60-B4A7-6FEDAFAD6946}"/>
               </a:ext>
             </a:extLst>
           </p:cNvPr>
@@ -7670,7 +7670,7 @@
           <p:cNvPr id="29" name="benchmark-merged-2-text">
             <a:extLst xmlns:a="http://schemas.openxmlformats.org/drawingml/2006/main">
               <a:ext uri="{FF2B5EF4-FFF2-40B4-BE49-F238E27FC236}">
-                <a16:creationId xmlns:a16="http://schemas.microsoft.com/office/drawing/2014/main" id="{539B4A99-1C6D-4F56-80F0-256CE9986A32}"/>
+                <a16:creationId xmlns:a16="http://schemas.microsoft.com/office/drawing/2014/main" id="{2D96AB6B-F6ED-4EF0-AA86-0632BDAF331E}"/>
               </a:ext>
             </a:extLst>
           </p:cNvPr>
@@ -7723,7 +7723,7 @@
           <p:cNvPr id="30" name="benchmark-label-3-surface">
             <a:extLst xmlns:a="http://schemas.openxmlformats.org/drawingml/2006/main">
               <a:ext uri="{FF2B5EF4-FFF2-40B4-BE49-F238E27FC236}">
-                <a16:creationId xmlns:a16="http://schemas.microsoft.com/office/drawing/2014/main" id="{1ABF3FBC-46F2-44EE-987E-16393A5B7D9C}"/>
+                <a16:creationId xmlns:a16="http://schemas.microsoft.com/office/drawing/2014/main" id="{C7180D4D-A806-4AF7-95B8-53D2275AF2C5}"/>
               </a:ext>
             </a:extLst>
           </p:cNvPr>
@@ -7756,7 +7756,7 @@
           <p:cNvPr id="31" name="benchmark-label-3-text">
             <a:extLst xmlns:a="http://schemas.openxmlformats.org/drawingml/2006/main">
               <a:ext uri="{FF2B5EF4-FFF2-40B4-BE49-F238E27FC236}">
-                <a16:creationId xmlns:a16="http://schemas.microsoft.com/office/drawing/2014/main" id="{88C2F739-E9CB-45C5-8274-5388AF9B25AE}"/>
+                <a16:creationId xmlns:a16="http://schemas.microsoft.com/office/drawing/2014/main" id="{17F83B02-FA8C-475F-9844-952D6FE976AD}"/>
               </a:ext>
             </a:extLst>
           </p:cNvPr>
@@ -7809,7 +7809,7 @@
           <p:cNvPr id="32" name="benchmark-left-3-surface">
             <a:extLst xmlns:a="http://schemas.openxmlformats.org/drawingml/2006/main">
               <a:ext uri="{FF2B5EF4-FFF2-40B4-BE49-F238E27FC236}">
-                <a16:creationId xmlns:a16="http://schemas.microsoft.com/office/drawing/2014/main" id="{5F483188-A48C-4125-BC12-0F5E27ED6D68}"/>
+                <a16:creationId xmlns:a16="http://schemas.microsoft.com/office/drawing/2014/main" id="{28413388-8022-4DB4-A192-F93A99EEAC98}"/>
               </a:ext>
             </a:extLst>
           </p:cNvPr>
@@ -7842,7 +7842,7 @@
           <p:cNvPr id="33" name="benchmark-left-3-text">
             <a:extLst xmlns:a="http://schemas.openxmlformats.org/drawingml/2006/main">
               <a:ext uri="{FF2B5EF4-FFF2-40B4-BE49-F238E27FC236}">
-                <a16:creationId xmlns:a16="http://schemas.microsoft.com/office/drawing/2014/main" id="{351B0458-487F-4F08-AB6B-23036B4D4808}"/>
+                <a16:creationId xmlns:a16="http://schemas.microsoft.com/office/drawing/2014/main" id="{E5015D27-6C08-430D-8DCA-81FA85D77279}"/>
               </a:ext>
             </a:extLst>
           </p:cNvPr>
@@ -7895,7 +7895,7 @@
           <p:cNvPr id="34" name="benchmark-right-3-surface">
             <a:extLst xmlns:a="http://schemas.openxmlformats.org/drawingml/2006/main">
               <a:ext uri="{FF2B5EF4-FFF2-40B4-BE49-F238E27FC236}">
-                <a16:creationId xmlns:a16="http://schemas.microsoft.com/office/drawing/2014/main" id="{7B1C647F-EEBF-4D4F-8263-1CC2B35D86CD}"/>
+                <a16:creationId xmlns:a16="http://schemas.microsoft.com/office/drawing/2014/main" id="{C01B922B-2753-43B7-935D-01E303EC9365}"/>
               </a:ext>
             </a:extLst>
           </p:cNvPr>
@@ -7928,7 +7928,7 @@
           <p:cNvPr id="35" name="benchmark-right-3-text">
             <a:extLst xmlns:a="http://schemas.openxmlformats.org/drawingml/2006/main">
               <a:ext uri="{FF2B5EF4-FFF2-40B4-BE49-F238E27FC236}">
-                <a16:creationId xmlns:a16="http://schemas.microsoft.com/office/drawing/2014/main" id="{2616EEB3-DBE3-403D-9A88-DCA34ABDD6E2}"/>
+                <a16:creationId xmlns:a16="http://schemas.microsoft.com/office/drawing/2014/main" id="{B1A91687-74AB-49ED-AAC8-560C99B18A3B}"/>
               </a:ext>
             </a:extLst>
           </p:cNvPr>
@@ -7981,7 +7981,7 @@
           <p:cNvPr id="36" name="benchmark-label-4-surface">
             <a:extLst xmlns:a="http://schemas.openxmlformats.org/drawingml/2006/main">
               <a:ext uri="{FF2B5EF4-FFF2-40B4-BE49-F238E27FC236}">
-                <a16:creationId xmlns:a16="http://schemas.microsoft.com/office/drawing/2014/main" id="{F83DB137-83B5-4865-871C-2BCEB4EF2D26}"/>
+                <a16:creationId xmlns:a16="http://schemas.microsoft.com/office/drawing/2014/main" id="{6BE7AC1B-B9A8-4264-88EC-0737C11AA31E}"/>
               </a:ext>
             </a:extLst>
           </p:cNvPr>
@@ -8014,7 +8014,7 @@
           <p:cNvPr id="37" name="benchmark-label-4-text">
             <a:extLst xmlns:a="http://schemas.openxmlformats.org/drawingml/2006/main">
               <a:ext uri="{FF2B5EF4-FFF2-40B4-BE49-F238E27FC236}">
-                <a16:creationId xmlns:a16="http://schemas.microsoft.com/office/drawing/2014/main" id="{2BEC8A1B-30B7-487C-A9C5-121FF89795C8}"/>
+                <a16:creationId xmlns:a16="http://schemas.microsoft.com/office/drawing/2014/main" id="{603B2769-86BB-4CE2-8411-3BAF30F4C414}"/>
               </a:ext>
             </a:extLst>
           </p:cNvPr>
@@ -8067,7 +8067,7 @@
           <p:cNvPr id="38" name="benchmark-left-4-surface">
             <a:extLst xmlns:a="http://schemas.openxmlformats.org/drawingml/2006/main">
               <a:ext uri="{FF2B5EF4-FFF2-40B4-BE49-F238E27FC236}">
-                <a16:creationId xmlns:a16="http://schemas.microsoft.com/office/drawing/2014/main" id="{AA3408C5-E6E0-4E60-993A-FA0A5811AFEC}"/>
+                <a16:creationId xmlns:a16="http://schemas.microsoft.com/office/drawing/2014/main" id="{A44A2711-345B-4E0A-A665-EE60359D0B6B}"/>
               </a:ext>
             </a:extLst>
           </p:cNvPr>
@@ -8100,7 +8100,7 @@
           <p:cNvPr id="39" name="benchmark-left-4-text">
             <a:extLst xmlns:a="http://schemas.openxmlformats.org/drawingml/2006/main">
               <a:ext uri="{FF2B5EF4-FFF2-40B4-BE49-F238E27FC236}">
-                <a16:creationId xmlns:a16="http://schemas.microsoft.com/office/drawing/2014/main" id="{411AE93F-4920-4271-AA9B-1322FE1A973B}"/>
+                <a16:creationId xmlns:a16="http://schemas.microsoft.com/office/drawing/2014/main" id="{DFBB67BA-B32F-4D0E-B1C9-12E7EFBB459A}"/>
               </a:ext>
             </a:extLst>
           </p:cNvPr>
@@ -8173,7 +8173,7 @@
           <p:cNvPr id="40" name="benchmark-right-4-surface">
             <a:extLst xmlns:a="http://schemas.openxmlformats.org/drawingml/2006/main">
               <a:ext uri="{FF2B5EF4-FFF2-40B4-BE49-F238E27FC236}">
-                <a16:creationId xmlns:a16="http://schemas.microsoft.com/office/drawing/2014/main" id="{4D36784F-19D9-4CD6-8241-43D4C40F16F4}"/>
+                <a16:creationId xmlns:a16="http://schemas.microsoft.com/office/drawing/2014/main" id="{597E2720-083B-435D-B57A-84537912DDF1}"/>
               </a:ext>
             </a:extLst>
           </p:cNvPr>
@@ -8206,7 +8206,7 @@
           <p:cNvPr id="41" name="benchmark-right-4-text">
             <a:extLst xmlns:a="http://schemas.openxmlformats.org/drawingml/2006/main">
               <a:ext uri="{FF2B5EF4-FFF2-40B4-BE49-F238E27FC236}">
-                <a16:creationId xmlns:a16="http://schemas.microsoft.com/office/drawing/2014/main" id="{38E96D64-E1A1-48C2-83BF-053D72C720AA}"/>
+                <a16:creationId xmlns:a16="http://schemas.microsoft.com/office/drawing/2014/main" id="{6B85CF67-1AEA-43F7-BC04-78B9F9F0EA68}"/>
               </a:ext>
             </a:extLst>
           </p:cNvPr>
@@ -8257,7 +8257,7 @@
     </p:spTree>
     <p:extLst>
       <p:ext uri="{BB962C8B-B14F-4D97-AF65-F5344CB8AC3E}">
-        <p14:creationId xmlns:p14="http://schemas.microsoft.com/office/powerpoint/2010/main" val="1880076968"/>
+        <p14:creationId xmlns:p14="http://schemas.microsoft.com/office/powerpoint/2010/main" val="1262674144"/>
       </p:ext>
     </p:extLst>
   </p:cSld>
@@ -8288,7 +8288,7 @@
           <p:cNvPr id="30" name="header-shadow-line">
             <a:extLst xmlns:a="http://schemas.openxmlformats.org/drawingml/2006/main">
               <a:ext uri="{FF2B5EF4-FFF2-40B4-BE49-F238E27FC236}">
-                <a16:creationId xmlns:a16="http://schemas.microsoft.com/office/drawing/2014/main" id="{B20A3CFF-52C8-400B-93B4-6BD1698DCC4F}"/>
+                <a16:creationId xmlns:a16="http://schemas.microsoft.com/office/drawing/2014/main" id="{581EBB15-B978-4347-8FC5-C8F9527FCBF0}"/>
               </a:ext>
             </a:extLst>
           </p:cNvPr>
@@ -8319,7 +8319,7 @@
           <p:cNvPr id="2" name="header-green-line">
             <a:extLst xmlns:a="http://schemas.openxmlformats.org/drawingml/2006/main">
               <a:ext uri="{FF2B5EF4-FFF2-40B4-BE49-F238E27FC236}">
-                <a16:creationId xmlns:a16="http://schemas.microsoft.com/office/drawing/2014/main" id="{F05B3171-2F49-4E53-BE58-F9E91F8ADEC8}"/>
+                <a16:creationId xmlns:a16="http://schemas.microsoft.com/office/drawing/2014/main" id="{2E547FDE-3E30-4995-9E67-CD2E2AF0BDAC}"/>
               </a:ext>
             </a:extLst>
           </p:cNvPr>
@@ -8350,7 +8350,7 @@
           <p:cNvPr id="3" name="page-number-block">
             <a:extLst xmlns:a="http://schemas.openxmlformats.org/drawingml/2006/main">
               <a:ext uri="{FF2B5EF4-FFF2-40B4-BE49-F238E27FC236}">
-                <a16:creationId xmlns:a16="http://schemas.microsoft.com/office/drawing/2014/main" id="{C4ED8F17-867D-48B5-AA59-9ADC4EE9B350}"/>
+                <a16:creationId xmlns:a16="http://schemas.microsoft.com/office/drawing/2014/main" id="{2444C457-9E0E-4779-914E-1B5C96C6A0AC}"/>
               </a:ext>
             </a:extLst>
           </p:cNvPr>
@@ -8381,7 +8381,7 @@
           <p:cNvPr id="4" name="page-number">
             <a:extLst xmlns:a="http://schemas.openxmlformats.org/drawingml/2006/main">
               <a:ext uri="{FF2B5EF4-FFF2-40B4-BE49-F238E27FC236}">
-                <a16:creationId xmlns:a16="http://schemas.microsoft.com/office/drawing/2014/main" id="{48D1ADAF-9952-4CDE-AD60-C9F9DA94C31D}"/>
+                <a16:creationId xmlns:a16="http://schemas.microsoft.com/office/drawing/2014/main" id="{C91E1667-21F3-4042-903A-A6CA42D392EB}"/>
               </a:ext>
             </a:extLst>
           </p:cNvPr>
@@ -8434,7 +8434,7 @@
           <p:cNvPr id="5" name="page-title">
             <a:extLst xmlns:a="http://schemas.openxmlformats.org/drawingml/2006/main">
               <a:ext uri="{FF2B5EF4-FFF2-40B4-BE49-F238E27FC236}">
-                <a16:creationId xmlns:a16="http://schemas.microsoft.com/office/drawing/2014/main" id="{73DA4B04-9304-407F-AEFE-D0335CBF1BB3}"/>
+                <a16:creationId xmlns:a16="http://schemas.microsoft.com/office/drawing/2014/main" id="{930594F5-3DBE-4BF9-9F30-3C11B3128128}"/>
               </a:ext>
             </a:extLst>
           </p:cNvPr>
@@ -8487,7 +8487,7 @@
           <p:cNvPr id="6" name="brand-wordmark">
             <a:extLst xmlns:a="http://schemas.openxmlformats.org/drawingml/2006/main">
               <a:ext uri="{FF2B5EF4-FFF2-40B4-BE49-F238E27FC236}">
-                <a16:creationId xmlns:a16="http://schemas.microsoft.com/office/drawing/2014/main" id="{2257EE60-E9F8-47FF-8246-BB74F44E31B6}"/>
+                <a16:creationId xmlns:a16="http://schemas.microsoft.com/office/drawing/2014/main" id="{81821918-6E69-4CA4-ABB1-88E6F8AC38A9}"/>
               </a:ext>
             </a:extLst>
           </p:cNvPr>
@@ -8540,7 +8540,7 @@
           <p:cNvPr id="7" name="internal-notice">
             <a:extLst xmlns:a="http://schemas.openxmlformats.org/drawingml/2006/main">
               <a:ext uri="{FF2B5EF4-FFF2-40B4-BE49-F238E27FC236}">
-                <a16:creationId xmlns:a16="http://schemas.microsoft.com/office/drawing/2014/main" id="{D0B5FC41-8B73-4350-B677-142A5D52A671}"/>
+                <a16:creationId xmlns:a16="http://schemas.microsoft.com/office/drawing/2014/main" id="{23A00648-19C6-4CBE-B75F-925DE58538CF}"/>
               </a:ext>
             </a:extLst>
           </p:cNvPr>
@@ -8593,7 +8593,7 @@
           <p:cNvPr id="8" name="precautions-label">
             <a:extLst xmlns:a="http://schemas.openxmlformats.org/drawingml/2006/main">
               <a:ext uri="{FF2B5EF4-FFF2-40B4-BE49-F238E27FC236}">
-                <a16:creationId xmlns:a16="http://schemas.microsoft.com/office/drawing/2014/main" id="{7D828FA0-8FC9-4ACB-883C-0CE8C4F45E45}"/>
+                <a16:creationId xmlns:a16="http://schemas.microsoft.com/office/drawing/2014/main" id="{D88E44E8-4A63-48A4-9230-C40104327E19}"/>
               </a:ext>
             </a:extLst>
           </p:cNvPr>
@@ -8648,7 +8648,7 @@
           <p:cNvPr id="9" name="precaution-item-0">
             <a:extLst xmlns:a="http://schemas.openxmlformats.org/drawingml/2006/main">
               <a:ext uri="{FF2B5EF4-FFF2-40B4-BE49-F238E27FC236}">
-                <a16:creationId xmlns:a16="http://schemas.microsoft.com/office/drawing/2014/main" id="{A18128A3-8432-4844-88C0-F01A406CC5A3}"/>
+                <a16:creationId xmlns:a16="http://schemas.microsoft.com/office/drawing/2014/main" id="{97709F9E-AFA5-4E38-90BD-30AFA221A133}"/>
               </a:ext>
             </a:extLst>
           </p:cNvPr>
@@ -8701,7 +8701,7 @@
           <p:cNvPr id="10" name="precaution-item-1">
             <a:extLst xmlns:a="http://schemas.openxmlformats.org/drawingml/2006/main">
               <a:ext uri="{FF2B5EF4-FFF2-40B4-BE49-F238E27FC236}">
-                <a16:creationId xmlns:a16="http://schemas.microsoft.com/office/drawing/2014/main" id="{2D747461-DD1D-4934-BFF8-F46B0EE65943}"/>
+                <a16:creationId xmlns:a16="http://schemas.microsoft.com/office/drawing/2014/main" id="{D0FFD48B-58BD-4B6D-9AD5-1AA0F04A3124}"/>
               </a:ext>
             </a:extLst>
           </p:cNvPr>
@@ -8754,7 +8754,7 @@
           <p:cNvPr id="11" name="precaution-item-2">
             <a:extLst xmlns:a="http://schemas.openxmlformats.org/drawingml/2006/main">
               <a:ext uri="{FF2B5EF4-FFF2-40B4-BE49-F238E27FC236}">
-                <a16:creationId xmlns:a16="http://schemas.microsoft.com/office/drawing/2014/main" id="{C9270BC9-13CC-4A0E-985B-10E8CEB1F714}"/>
+                <a16:creationId xmlns:a16="http://schemas.microsoft.com/office/drawing/2014/main" id="{B4887807-2A7D-47E9-957E-A72C67B0819E}"/>
               </a:ext>
             </a:extLst>
           </p:cNvPr>
@@ -8807,7 +8807,7 @@
           <p:cNvPr id="12" name="precaution-item-3">
             <a:extLst xmlns:a="http://schemas.openxmlformats.org/drawingml/2006/main">
               <a:ext uri="{FF2B5EF4-FFF2-40B4-BE49-F238E27FC236}">
-                <a16:creationId xmlns:a16="http://schemas.microsoft.com/office/drawing/2014/main" id="{0B0D134F-A5D2-42E0-8271-67B71CBCDAAC}"/>
+                <a16:creationId xmlns:a16="http://schemas.microsoft.com/office/drawing/2014/main" id="{AC536E8D-10DC-4CFA-9081-D0334DBBD08A}"/>
               </a:ext>
             </a:extLst>
           </p:cNvPr>
@@ -8860,7 +8860,7 @@
           <p:cNvPr id="13" name="precaution-item-4">
             <a:extLst xmlns:a="http://schemas.openxmlformats.org/drawingml/2006/main">
               <a:ext uri="{FF2B5EF4-FFF2-40B4-BE49-F238E27FC236}">
-                <a16:creationId xmlns:a16="http://schemas.microsoft.com/office/drawing/2014/main" id="{DF202C8F-5924-42C5-901A-32525C8C1A7A}"/>
+                <a16:creationId xmlns:a16="http://schemas.microsoft.com/office/drawing/2014/main" id="{F28917F3-A0E8-4A71-B43C-CA30ABAFCFDA}"/>
               </a:ext>
             </a:extLst>
           </p:cNvPr>
@@ -8913,7 +8913,7 @@
           <p:cNvPr id="14" name="precaution-card-0">
             <a:extLst xmlns:a="http://schemas.openxmlformats.org/drawingml/2006/main">
               <a:ext uri="{FF2B5EF4-FFF2-40B4-BE49-F238E27FC236}">
-                <a16:creationId xmlns:a16="http://schemas.microsoft.com/office/drawing/2014/main" id="{E4384D9F-DEF9-4C70-8B83-8C5D922AB0D0}"/>
+                <a16:creationId xmlns:a16="http://schemas.microsoft.com/office/drawing/2014/main" id="{2E33392B-B4D4-4A8B-9279-77D35C40EEFE}"/>
               </a:ext>
             </a:extLst>
           </p:cNvPr>
@@ -8946,7 +8946,7 @@
           <p:cNvPr id="15" name="precaution-card-title-0">
             <a:extLst xmlns:a="http://schemas.openxmlformats.org/drawingml/2006/main">
               <a:ext uri="{FF2B5EF4-FFF2-40B4-BE49-F238E27FC236}">
-                <a16:creationId xmlns:a16="http://schemas.microsoft.com/office/drawing/2014/main" id="{67C70946-2B13-4CB2-80A1-FA8843E01421}"/>
+                <a16:creationId xmlns:a16="http://schemas.microsoft.com/office/drawing/2014/main" id="{90DB5F4D-D0F3-4A2E-9A1A-91E3B9E063B6}"/>
               </a:ext>
             </a:extLst>
           </p:cNvPr>
@@ -8999,7 +8999,7 @@
           <p:cNvPr id="16" name="precaution-asset-0-surface">
             <a:extLst xmlns:a="http://schemas.openxmlformats.org/drawingml/2006/main">
               <a:ext uri="{FF2B5EF4-FFF2-40B4-BE49-F238E27FC236}">
-                <a16:creationId xmlns:a16="http://schemas.microsoft.com/office/drawing/2014/main" id="{155FAB6A-8EEA-4514-8E88-A1D646A36331}"/>
+                <a16:creationId xmlns:a16="http://schemas.microsoft.com/office/drawing/2014/main" id="{03CF7F70-3799-4871-96D1-17223B8B2622}"/>
               </a:ext>
             </a:extLst>
           </p:cNvPr>
@@ -9032,7 +9032,7 @@
           <p:cNvPr id="17" name="precaution-asset-0-label">
             <a:extLst xmlns:a="http://schemas.openxmlformats.org/drawingml/2006/main">
               <a:ext uri="{FF2B5EF4-FFF2-40B4-BE49-F238E27FC236}">
-                <a16:creationId xmlns:a16="http://schemas.microsoft.com/office/drawing/2014/main" id="{256B0BF8-FA18-4257-B4A0-922DBFA9D689}"/>
+                <a16:creationId xmlns:a16="http://schemas.microsoft.com/office/drawing/2014/main" id="{290B864A-EF42-4F96-A046-BF1AAB47976A}"/>
               </a:ext>
             </a:extLst>
           </p:cNvPr>
@@ -9105,7 +9105,7 @@
           <p:cNvPr id="18" name="precaution-card-1">
             <a:extLst xmlns:a="http://schemas.openxmlformats.org/drawingml/2006/main">
               <a:ext uri="{FF2B5EF4-FFF2-40B4-BE49-F238E27FC236}">
-                <a16:creationId xmlns:a16="http://schemas.microsoft.com/office/drawing/2014/main" id="{CD9902A3-C135-4E8F-AD29-082C4BB81474}"/>
+                <a16:creationId xmlns:a16="http://schemas.microsoft.com/office/drawing/2014/main" id="{8D1E3F5E-D4DA-4F74-B752-2BF475602E72}"/>
               </a:ext>
             </a:extLst>
           </p:cNvPr>
@@ -9138,7 +9138,7 @@
           <p:cNvPr id="19" name="precaution-card-title-1">
             <a:extLst xmlns:a="http://schemas.openxmlformats.org/drawingml/2006/main">
               <a:ext uri="{FF2B5EF4-FFF2-40B4-BE49-F238E27FC236}">
-                <a16:creationId xmlns:a16="http://schemas.microsoft.com/office/drawing/2014/main" id="{989DDFED-549D-4DEE-B627-CD71E557EF8C}"/>
+                <a16:creationId xmlns:a16="http://schemas.microsoft.com/office/drawing/2014/main" id="{02458787-EBAD-404C-B16F-1B5C5163CDC0}"/>
               </a:ext>
             </a:extLst>
           </p:cNvPr>
@@ -9191,7 +9191,7 @@
           <p:cNvPr id="20" name="precaution-asset-1-surface">
             <a:extLst xmlns:a="http://schemas.openxmlformats.org/drawingml/2006/main">
               <a:ext uri="{FF2B5EF4-FFF2-40B4-BE49-F238E27FC236}">
-                <a16:creationId xmlns:a16="http://schemas.microsoft.com/office/drawing/2014/main" id="{B43C3D74-D255-4C1C-BE87-19489AD310F0}"/>
+                <a16:creationId xmlns:a16="http://schemas.microsoft.com/office/drawing/2014/main" id="{667C2754-15CA-43FD-A11A-F7E678179A29}"/>
               </a:ext>
             </a:extLst>
           </p:cNvPr>
@@ -9224,7 +9224,7 @@
           <p:cNvPr id="21" name="precaution-asset-1-label">
             <a:extLst xmlns:a="http://schemas.openxmlformats.org/drawingml/2006/main">
               <a:ext uri="{FF2B5EF4-FFF2-40B4-BE49-F238E27FC236}">
-                <a16:creationId xmlns:a16="http://schemas.microsoft.com/office/drawing/2014/main" id="{64098045-B079-484C-8B0F-5D838E1F992B}"/>
+                <a16:creationId xmlns:a16="http://schemas.microsoft.com/office/drawing/2014/main" id="{C58A801D-3E67-4216-BB5E-0F969310D97D}"/>
               </a:ext>
             </a:extLst>
           </p:cNvPr>
@@ -9297,7 +9297,7 @@
           <p:cNvPr id="22" name="precaution-card-2">
             <a:extLst xmlns:a="http://schemas.openxmlformats.org/drawingml/2006/main">
               <a:ext uri="{FF2B5EF4-FFF2-40B4-BE49-F238E27FC236}">
-                <a16:creationId xmlns:a16="http://schemas.microsoft.com/office/drawing/2014/main" id="{F3AAC95B-49C3-4292-A24C-5309907B711E}"/>
+                <a16:creationId xmlns:a16="http://schemas.microsoft.com/office/drawing/2014/main" id="{F1CC7EB1-C889-493C-A82C-E667B7594494}"/>
               </a:ext>
             </a:extLst>
           </p:cNvPr>
@@ -9330,7 +9330,7 @@
           <p:cNvPr id="23" name="precaution-card-title-2">
             <a:extLst xmlns:a="http://schemas.openxmlformats.org/drawingml/2006/main">
               <a:ext uri="{FF2B5EF4-FFF2-40B4-BE49-F238E27FC236}">
-                <a16:creationId xmlns:a16="http://schemas.microsoft.com/office/drawing/2014/main" id="{E0763AD8-9BFD-49F3-BD00-32587C4F2D84}"/>
+                <a16:creationId xmlns:a16="http://schemas.microsoft.com/office/drawing/2014/main" id="{2EE1FCAE-B2E0-4A68-A4A1-6D5437A44910}"/>
               </a:ext>
             </a:extLst>
           </p:cNvPr>
@@ -9383,7 +9383,7 @@
           <p:cNvPr id="24" name="precaution-asset-2-surface">
             <a:extLst xmlns:a="http://schemas.openxmlformats.org/drawingml/2006/main">
               <a:ext uri="{FF2B5EF4-FFF2-40B4-BE49-F238E27FC236}">
-                <a16:creationId xmlns:a16="http://schemas.microsoft.com/office/drawing/2014/main" id="{14BAB446-25B9-4935-AA19-D78725695817}"/>
+                <a16:creationId xmlns:a16="http://schemas.microsoft.com/office/drawing/2014/main" id="{6EF4C6F0-BD0C-49F9-82F9-5714348D9142}"/>
               </a:ext>
             </a:extLst>
           </p:cNvPr>
@@ -9416,7 +9416,7 @@
           <p:cNvPr id="25" name="precaution-asset-2-label">
             <a:extLst xmlns:a="http://schemas.openxmlformats.org/drawingml/2006/main">
               <a:ext uri="{FF2B5EF4-FFF2-40B4-BE49-F238E27FC236}">
-                <a16:creationId xmlns:a16="http://schemas.microsoft.com/office/drawing/2014/main" id="{F02BCFAF-36C4-449F-8488-5575604F068A}"/>
+                <a16:creationId xmlns:a16="http://schemas.microsoft.com/office/drawing/2014/main" id="{368C4013-113E-4F6A-B1D0-FBBF2D763DA7}"/>
               </a:ext>
             </a:extLst>
           </p:cNvPr>
@@ -9489,7 +9489,7 @@
           <p:cNvPr id="26" name="precaution-card-3">
             <a:extLst xmlns:a="http://schemas.openxmlformats.org/drawingml/2006/main">
               <a:ext uri="{FF2B5EF4-FFF2-40B4-BE49-F238E27FC236}">
-                <a16:creationId xmlns:a16="http://schemas.microsoft.com/office/drawing/2014/main" id="{9A2A499A-8B5E-40C3-9EA7-AC8ABEEFE6AE}"/>
+                <a16:creationId xmlns:a16="http://schemas.microsoft.com/office/drawing/2014/main" id="{22738DC6-3DD0-42BF-8114-F4C8FA1BD957}"/>
               </a:ext>
             </a:extLst>
           </p:cNvPr>
@@ -9522,7 +9522,7 @@
           <p:cNvPr id="27" name="precaution-card-title-3">
             <a:extLst xmlns:a="http://schemas.openxmlformats.org/drawingml/2006/main">
               <a:ext uri="{FF2B5EF4-FFF2-40B4-BE49-F238E27FC236}">
-                <a16:creationId xmlns:a16="http://schemas.microsoft.com/office/drawing/2014/main" id="{AAAE6D1B-ADAF-4E31-8C73-8B23CE0A7B53}"/>
+                <a16:creationId xmlns:a16="http://schemas.microsoft.com/office/drawing/2014/main" id="{7127010C-C4DC-4372-8415-BB9156F0F1B3}"/>
               </a:ext>
             </a:extLst>
           </p:cNvPr>
@@ -9575,7 +9575,7 @@
           <p:cNvPr id="28" name="precaution-asset-3-surface">
             <a:extLst xmlns:a="http://schemas.openxmlformats.org/drawingml/2006/main">
               <a:ext uri="{FF2B5EF4-FFF2-40B4-BE49-F238E27FC236}">
-                <a16:creationId xmlns:a16="http://schemas.microsoft.com/office/drawing/2014/main" id="{59DC7194-86AE-46A2-9D42-F54681896CA4}"/>
+                <a16:creationId xmlns:a16="http://schemas.microsoft.com/office/drawing/2014/main" id="{A39FC716-C9A3-497A-92A1-584D552DDBF1}"/>
               </a:ext>
             </a:extLst>
           </p:cNvPr>
@@ -9608,7 +9608,7 @@
           <p:cNvPr id="29" name="precaution-asset-3-label">
             <a:extLst xmlns:a="http://schemas.openxmlformats.org/drawingml/2006/main">
               <a:ext uri="{FF2B5EF4-FFF2-40B4-BE49-F238E27FC236}">
-                <a16:creationId xmlns:a16="http://schemas.microsoft.com/office/drawing/2014/main" id="{22BF7C25-6B1C-42CA-B87C-27BF53605D77}"/>
+                <a16:creationId xmlns:a16="http://schemas.microsoft.com/office/drawing/2014/main" id="{AA0C6C86-4DCC-4CAF-B338-8D099C4F9E0C}"/>
               </a:ext>
             </a:extLst>
           </p:cNvPr>
@@ -9679,7 +9679,7 @@
     </p:spTree>
     <p:extLst>
       <p:ext uri="{BB962C8B-B14F-4D97-AF65-F5344CB8AC3E}">
-        <p14:creationId xmlns:p14="http://schemas.microsoft.com/office/powerpoint/2010/main" val="1182744639"/>
+        <p14:creationId xmlns:p14="http://schemas.microsoft.com/office/powerpoint/2010/main" val="540265927"/>
       </p:ext>
     </p:extLst>
   </p:cSld>
